--- a/lecture-slides_upload/lecture/07_Statistical Methods_Mediation and Moderation.pptx
+++ b/lecture-slides_upload/lecture/07_Statistical Methods_Mediation and Moderation.pptx
@@ -5,35 +5,36 @@
     <p:sldMasterId id="2147483648" r:id="rId1"/>
   </p:sldMasterIdLst>
   <p:notesMasterIdLst>
-    <p:notesMasterId r:id="rId28"/>
+    <p:notesMasterId r:id="rId29"/>
   </p:notesMasterIdLst>
   <p:sldIdLst>
-    <p:sldId id="257" r:id="rId2"/>
-    <p:sldId id="277" r:id="rId3"/>
-    <p:sldId id="278" r:id="rId4"/>
-    <p:sldId id="258" r:id="rId5"/>
-    <p:sldId id="259" r:id="rId6"/>
-    <p:sldId id="260" r:id="rId7"/>
-    <p:sldId id="261" r:id="rId8"/>
-    <p:sldId id="263" r:id="rId9"/>
-    <p:sldId id="264" r:id="rId10"/>
-    <p:sldId id="270" r:id="rId11"/>
-    <p:sldId id="271" r:id="rId12"/>
-    <p:sldId id="289" r:id="rId13"/>
-    <p:sldId id="290" r:id="rId14"/>
-    <p:sldId id="291" r:id="rId15"/>
-    <p:sldId id="273" r:id="rId16"/>
-    <p:sldId id="279" r:id="rId17"/>
-    <p:sldId id="280" r:id="rId18"/>
-    <p:sldId id="274" r:id="rId19"/>
-    <p:sldId id="282" r:id="rId20"/>
-    <p:sldId id="283" r:id="rId21"/>
-    <p:sldId id="284" r:id="rId22"/>
-    <p:sldId id="285" r:id="rId23"/>
-    <p:sldId id="275" r:id="rId24"/>
-    <p:sldId id="276" r:id="rId25"/>
-    <p:sldId id="281" r:id="rId26"/>
-    <p:sldId id="292" r:id="rId27"/>
+    <p:sldId id="293" r:id="rId2"/>
+    <p:sldId id="257" r:id="rId3"/>
+    <p:sldId id="277" r:id="rId4"/>
+    <p:sldId id="278" r:id="rId5"/>
+    <p:sldId id="258" r:id="rId6"/>
+    <p:sldId id="259" r:id="rId7"/>
+    <p:sldId id="260" r:id="rId8"/>
+    <p:sldId id="261" r:id="rId9"/>
+    <p:sldId id="263" r:id="rId10"/>
+    <p:sldId id="264" r:id="rId11"/>
+    <p:sldId id="270" r:id="rId12"/>
+    <p:sldId id="271" r:id="rId13"/>
+    <p:sldId id="289" r:id="rId14"/>
+    <p:sldId id="290" r:id="rId15"/>
+    <p:sldId id="291" r:id="rId16"/>
+    <p:sldId id="273" r:id="rId17"/>
+    <p:sldId id="279" r:id="rId18"/>
+    <p:sldId id="280" r:id="rId19"/>
+    <p:sldId id="274" r:id="rId20"/>
+    <p:sldId id="282" r:id="rId21"/>
+    <p:sldId id="283" r:id="rId22"/>
+    <p:sldId id="284" r:id="rId23"/>
+    <p:sldId id="285" r:id="rId24"/>
+    <p:sldId id="275" r:id="rId25"/>
+    <p:sldId id="276" r:id="rId26"/>
+    <p:sldId id="281" r:id="rId27"/>
+    <p:sldId id="292" r:id="rId28"/>
   </p:sldIdLst>
   <p:sldSz cx="12192000" cy="6858000"/>
   <p:notesSz cx="6858000" cy="9144000"/>
@@ -470,7 +471,7 @@
           <a:p>
             <a:fld id="{6A4B1ABF-BAF2-0E4B-88A8-8F2BBF0074AC}" type="datetimeFigureOut">
               <a:rPr lang="en-US" smtClean="0"/>
-              <a:t>2/29/24</a:t>
+              <a:t>10/14/25</a:t>
             </a:fld>
             <a:endParaRPr lang="en-US"/>
           </a:p>
@@ -802,7 +803,7 @@
           <a:p>
             <a:fld id="{66610047-E131-0346-ABBC-77645D001C55}" type="slidenum">
               <a:rPr lang="en-US" smtClean="0"/>
-              <a:t>1</a:t>
+              <a:t>2</a:t>
             </a:fld>
             <a:endParaRPr lang="en-US"/>
           </a:p>
@@ -886,7 +887,7 @@
           <a:p>
             <a:fld id="{66610047-E131-0346-ABBC-77645D001C55}" type="slidenum">
               <a:rPr lang="en-US" smtClean="0"/>
-              <a:t>12</a:t>
+              <a:t>13</a:t>
             </a:fld>
             <a:endParaRPr lang="en-US"/>
           </a:p>
@@ -970,7 +971,7 @@
           <a:p>
             <a:fld id="{66610047-E131-0346-ABBC-77645D001C55}" type="slidenum">
               <a:rPr lang="en-US" smtClean="0"/>
-              <a:t>13</a:t>
+              <a:t>14</a:t>
             </a:fld>
             <a:endParaRPr lang="en-US"/>
           </a:p>
@@ -1054,7 +1055,7 @@
           <a:p>
             <a:fld id="{66610047-E131-0346-ABBC-77645D001C55}" type="slidenum">
               <a:rPr lang="en-US" smtClean="0"/>
-              <a:t>14</a:t>
+              <a:t>15</a:t>
             </a:fld>
             <a:endParaRPr lang="en-US"/>
           </a:p>
@@ -1138,7 +1139,7 @@
           <a:p>
             <a:fld id="{66610047-E131-0346-ABBC-77645D001C55}" type="slidenum">
               <a:rPr lang="en-US" smtClean="0"/>
-              <a:t>26</a:t>
+              <a:t>27</a:t>
             </a:fld>
             <a:endParaRPr lang="en-US"/>
           </a:p>
@@ -1304,7 +1305,7 @@
           <a:p>
             <a:fld id="{BA763BF8-AC66-E249-9CE8-8353EEB16B82}" type="datetimeFigureOut">
               <a:rPr lang="en-US" smtClean="0"/>
-              <a:t>2/29/24</a:t>
+              <a:t>10/14/25</a:t>
             </a:fld>
             <a:endParaRPr lang="en-US"/>
           </a:p>
@@ -1506,7 +1507,7 @@
           <a:p>
             <a:fld id="{BA763BF8-AC66-E249-9CE8-8353EEB16B82}" type="datetimeFigureOut">
               <a:rPr lang="en-US" smtClean="0"/>
-              <a:t>2/29/24</a:t>
+              <a:t>10/14/25</a:t>
             </a:fld>
             <a:endParaRPr lang="en-US"/>
           </a:p>
@@ -1714,7 +1715,7 @@
           <a:p>
             <a:fld id="{BA763BF8-AC66-E249-9CE8-8353EEB16B82}" type="datetimeFigureOut">
               <a:rPr lang="en-US" smtClean="0"/>
-              <a:t>2/29/24</a:t>
+              <a:t>10/14/25</a:t>
             </a:fld>
             <a:endParaRPr lang="en-US"/>
           </a:p>
@@ -1916,7 +1917,7 @@
           <a:p>
             <a:fld id="{BA763BF8-AC66-E249-9CE8-8353EEB16B82}" type="datetimeFigureOut">
               <a:rPr lang="en-US" smtClean="0"/>
-              <a:t>2/29/24</a:t>
+              <a:t>10/14/25</a:t>
             </a:fld>
             <a:endParaRPr lang="en-US"/>
           </a:p>
@@ -2191,7 +2192,7 @@
           <a:p>
             <a:fld id="{BA763BF8-AC66-E249-9CE8-8353EEB16B82}" type="datetimeFigureOut">
               <a:rPr lang="en-US" smtClean="0"/>
-              <a:t>2/29/24</a:t>
+              <a:t>10/14/25</a:t>
             </a:fld>
             <a:endParaRPr lang="en-US"/>
           </a:p>
@@ -2460,7 +2461,7 @@
           <a:p>
             <a:fld id="{BA763BF8-AC66-E249-9CE8-8353EEB16B82}" type="datetimeFigureOut">
               <a:rPr lang="en-US" smtClean="0"/>
-              <a:t>2/29/24</a:t>
+              <a:t>10/14/25</a:t>
             </a:fld>
             <a:endParaRPr lang="en-US"/>
           </a:p>
@@ -2876,7 +2877,7 @@
           <a:p>
             <a:fld id="{BA763BF8-AC66-E249-9CE8-8353EEB16B82}" type="datetimeFigureOut">
               <a:rPr lang="en-US" smtClean="0"/>
-              <a:t>2/29/24</a:t>
+              <a:t>10/14/25</a:t>
             </a:fld>
             <a:endParaRPr lang="en-US"/>
           </a:p>
@@ -3021,7 +3022,7 @@
           <a:p>
             <a:fld id="{BA763BF8-AC66-E249-9CE8-8353EEB16B82}" type="datetimeFigureOut">
               <a:rPr lang="en-US" smtClean="0"/>
-              <a:t>2/29/24</a:t>
+              <a:t>10/14/25</a:t>
             </a:fld>
             <a:endParaRPr lang="en-US"/>
           </a:p>
@@ -3134,7 +3135,7 @@
           <a:p>
             <a:fld id="{BA763BF8-AC66-E249-9CE8-8353EEB16B82}" type="datetimeFigureOut">
               <a:rPr lang="en-US" smtClean="0"/>
-              <a:t>2/29/24</a:t>
+              <a:t>10/14/25</a:t>
             </a:fld>
             <a:endParaRPr lang="en-US"/>
           </a:p>
@@ -3445,7 +3446,7 @@
           <a:p>
             <a:fld id="{BA763BF8-AC66-E249-9CE8-8353EEB16B82}" type="datetimeFigureOut">
               <a:rPr lang="en-US" smtClean="0"/>
-              <a:t>2/29/24</a:t>
+              <a:t>10/14/25</a:t>
             </a:fld>
             <a:endParaRPr lang="en-US"/>
           </a:p>
@@ -3733,7 +3734,7 @@
           <a:p>
             <a:fld id="{BA763BF8-AC66-E249-9CE8-8353EEB16B82}" type="datetimeFigureOut">
               <a:rPr lang="en-US" smtClean="0"/>
-              <a:t>2/29/24</a:t>
+              <a:t>10/14/25</a:t>
             </a:fld>
             <a:endParaRPr lang="en-US"/>
           </a:p>
@@ -3977,7 +3978,7 @@
             <a:fld id="{BA763BF8-AC66-E249-9CE8-8353EEB16B82}" type="datetimeFigureOut">
               <a:rPr lang="en-US" smtClean="0"/>
               <a:pPr/>
-              <a:t>2/29/24</a:t>
+              <a:t>10/14/25</a:t>
             </a:fld>
             <a:endParaRPr lang="en-US"/>
           </a:p>
@@ -4401,70 +4402,98 @@
       </p:grpSpPr>
       <p:sp>
         <p:nvSpPr>
-          <p:cNvPr id="2" name="Title 1"/>
+          <p:cNvPr id="2" name="Title 1">
+            <a:extLst>
+              <a:ext uri="{FF2B5EF4-FFF2-40B4-BE49-F238E27FC236}">
+                <a16:creationId xmlns:a16="http://schemas.microsoft.com/office/drawing/2014/main" id="{F83EB57B-86E6-15AE-21C8-B3039EEC6A2D}"/>
+              </a:ext>
+            </a:extLst>
+          </p:cNvPr>
           <p:cNvSpPr>
             <a:spLocks noGrp="1"/>
           </p:cNvSpPr>
           <p:nvPr>
-            <p:ph type="ctrTitle"/>
+            <p:ph type="title"/>
           </p:nvPr>
         </p:nvSpPr>
         <p:spPr/>
-        <p:txBody>
-          <a:bodyPr>
-            <a:normAutofit/>
-          </a:bodyPr>
-          <a:lstStyle/>
-          <a:p>
-            <a:r>
-              <a:rPr lang="en-GB" dirty="0"/>
-              <a:t>Mediation and Moderation</a:t>
-            </a:r>
-          </a:p>
-        </p:txBody>
-      </p:sp>
-      <p:sp>
-        <p:nvSpPr>
-          <p:cNvPr id="3" name="Subtitle 2"/>
-          <p:cNvSpPr>
-            <a:spLocks noGrp="1"/>
-          </p:cNvSpPr>
-          <p:nvPr>
-            <p:ph type="subTitle" idx="1"/>
-          </p:nvPr>
-        </p:nvSpPr>
-        <p:spPr>
-          <a:xfrm>
-            <a:off x="1524000" y="3869324"/>
-            <a:ext cx="9144000" cy="1655762"/>
-          </a:xfrm>
-        </p:spPr>
         <p:txBody>
           <a:bodyPr/>
           <a:lstStyle/>
           <a:p>
             <a:r>
-              <a:rPr lang="en-GB" dirty="0"/>
-              <a:t>Jamil </a:t>
-            </a:r>
-            <a:r>
-              <a:rPr lang="en-GB" dirty="0" err="1"/>
-              <a:t>Bhanji</a:t>
-            </a:r>
-            <a:endParaRPr lang="en-GB" dirty="0"/>
-          </a:p>
-          <a:p>
-            <a:r>
-              <a:rPr lang="en-GB" dirty="0"/>
-              <a:t>with help from Vanessa </a:t>
-            </a:r>
-            <a:r>
-              <a:rPr lang="en-GB" dirty="0" err="1"/>
-              <a:t>Lobue</a:t>
-            </a:r>
-            <a:r>
-              <a:rPr lang="en-GB" dirty="0"/>
-              <a:t> and Andy Field</a:t>
+              <a:rPr lang="en-US" dirty="0"/>
+              <a:t>From last week</a:t>
+            </a:r>
+          </a:p>
+        </p:txBody>
+      </p:sp>
+      <p:sp>
+        <p:nvSpPr>
+          <p:cNvPr id="3" name="Content Placeholder 2">
+            <a:extLst>
+              <a:ext uri="{FF2B5EF4-FFF2-40B4-BE49-F238E27FC236}">
+                <a16:creationId xmlns:a16="http://schemas.microsoft.com/office/drawing/2014/main" id="{6506D326-D5F0-8795-5F7F-3D6164293302}"/>
+              </a:ext>
+            </a:extLst>
+          </p:cNvPr>
+          <p:cNvSpPr>
+            <a:spLocks noGrp="1"/>
+          </p:cNvSpPr>
+          <p:nvPr>
+            <p:ph idx="1"/>
+          </p:nvPr>
+        </p:nvSpPr>
+        <p:spPr/>
+        <p:txBody>
+          <a:bodyPr/>
+          <a:lstStyle/>
+          <a:p>
+            <a:r>
+              <a:rPr lang="en-US" dirty="0"/>
+              <a:t>Interpreting regression coefficients</a:t>
+            </a:r>
+          </a:p>
+          <a:p>
+            <a:pPr lvl="1"/>
+            <a:r>
+              <a:rPr lang="en-US" dirty="0"/>
+              <a:t>Unstandardized, standardized</a:t>
+            </a:r>
+          </a:p>
+          <a:p>
+            <a:pPr lvl="1"/>
+            <a:r>
+              <a:rPr lang="en-US" dirty="0"/>
+              <a:t>Odds ratios</a:t>
+            </a:r>
+          </a:p>
+          <a:p>
+            <a:pPr lvl="2"/>
+            <a:r>
+              <a:rPr lang="en-US" dirty="0"/>
+              <a:t>“exponentiate”</a:t>
+            </a:r>
+          </a:p>
+          <a:p>
+            <a:pPr lvl="2"/>
+            <a:r>
+              <a:rPr lang="en-US" dirty="0"/>
+              <a:t>2 = twice as likely</a:t>
+            </a:r>
+          </a:p>
+          <a:p>
+            <a:pPr lvl="2"/>
+            <a:r>
+              <a:rPr lang="en-US" dirty="0"/>
+              <a:t>1.5 = 50% more likely</a:t>
+            </a:r>
+          </a:p>
+          <a:p>
+            <a:pPr lvl="2"/>
+            <a:r>
+              <a:rPr lang="en-US" dirty="0"/>
+              <a:t>0.5 = 50% less likely</a:t>
             </a:r>
           </a:p>
         </p:txBody>
@@ -4472,7 +4501,7 @@
     </p:spTree>
     <p:extLst>
       <p:ext uri="{BB962C8B-B14F-4D97-AF65-F5344CB8AC3E}">
-        <p14:creationId xmlns:p14="http://schemas.microsoft.com/office/powerpoint/2010/main" val="907586198"/>
+        <p14:creationId xmlns:p14="http://schemas.microsoft.com/office/powerpoint/2010/main" val="1689111762"/>
       </p:ext>
     </p:extLst>
   </p:cSld>
@@ -4516,7 +4545,7 @@
           <a:p>
             <a:r>
               <a:rPr lang="en-US" dirty="0"/>
-              <a:t>Mediation</a:t>
+              <a:t>Centering Variables</a:t>
             </a:r>
           </a:p>
         </p:txBody>
@@ -4531,21 +4560,22 @@
             <p:ph idx="1"/>
           </p:nvPr>
         </p:nvSpPr>
-        <p:spPr>
-          <a:xfrm>
-            <a:off x="838200" y="1462768"/>
-            <a:ext cx="10515600" cy="4351338"/>
-          </a:xfrm>
-        </p:spPr>
-        <p:txBody>
-          <a:bodyPr>
-            <a:noAutofit/>
-          </a:bodyPr>
+        <p:spPr/>
+        <p:txBody>
+          <a:bodyPr/>
           <a:lstStyle/>
           <a:p>
             <a:r>
               <a:rPr lang="en-US" sz="3200" dirty="0"/>
-              <a:t>Refers to a situation when the relationship between a predictor variable and outcome variable can be explained by their relationship to a third variable (the mediator). </a:t>
+              <a:t>The interaction term makes the </a:t>
+            </a:r>
+            <a:r>
+              <a:rPr lang="en-US" sz="3200" i="1" dirty="0"/>
+              <a:t>b</a:t>
+            </a:r>
+            <a:r>
+              <a:rPr lang="en-US" sz="3200" dirty="0"/>
+              <a:t>s for the main predictors uninterpretable in many situations.</a:t>
             </a:r>
           </a:p>
           <a:p>
@@ -4553,37 +4583,28 @@
           </a:p>
           <a:p>
             <a:r>
-              <a:rPr lang="en-US" sz="3200" b="1" dirty="0"/>
-              <a:t>Mediation</a:t>
-            </a:r>
-            <a:r>
               <a:rPr lang="en-US" sz="3200" dirty="0"/>
-              <a:t> answers the </a:t>
-            </a:r>
-            <a:r>
-              <a:rPr lang="en-US" sz="3200" b="1" dirty="0"/>
-              <a:t>“how” </a:t>
-            </a:r>
+              <a:t>For this reason, it is common to transform the predictors using grand mean centering.</a:t>
+            </a:r>
+          </a:p>
+          <a:p>
+            <a:endParaRPr lang="en-US" sz="3200" dirty="0"/>
+          </a:p>
+          <a:p>
             <a:r>
               <a:rPr lang="en-US" sz="3200" dirty="0"/>
-              <a:t>two variables become associated</a:t>
-            </a:r>
-          </a:p>
-          <a:p>
-            <a:endParaRPr lang="en-US" sz="3200" dirty="0"/>
-          </a:p>
-          <a:p>
-            <a:r>
-              <a:rPr lang="en-US" sz="3200" dirty="0"/>
-              <a:t>**Mediation is a causal process which requires establishing the cause and effect relation over time</a:t>
-            </a:r>
+              <a:t>Centering refers to the process of transforming a variable into deviations around a fixed point.</a:t>
+            </a:r>
+          </a:p>
+          <a:p>
+            <a:endParaRPr lang="en-US" dirty="0"/>
           </a:p>
         </p:txBody>
       </p:sp>
     </p:spTree>
     <p:extLst>
       <p:ext uri="{BB962C8B-B14F-4D97-AF65-F5344CB8AC3E}">
-        <p14:creationId xmlns:p14="http://schemas.microsoft.com/office/powerpoint/2010/main" val="560640620"/>
+        <p14:creationId xmlns:p14="http://schemas.microsoft.com/office/powerpoint/2010/main" val="3814311374"/>
       </p:ext>
     </p:extLst>
   </p:cSld>
@@ -4790,6 +4811,297 @@
           <a:chExt cx="0" cy="0"/>
         </a:xfrm>
       </p:grpSpPr>
+      <p:sp>
+        <p:nvSpPr>
+          <p:cNvPr id="2" name="Title 1"/>
+          <p:cNvSpPr>
+            <a:spLocks noGrp="1"/>
+          </p:cNvSpPr>
+          <p:nvPr>
+            <p:ph type="title"/>
+          </p:nvPr>
+        </p:nvSpPr>
+        <p:spPr/>
+        <p:txBody>
+          <a:bodyPr/>
+          <a:lstStyle/>
+          <a:p>
+            <a:r>
+              <a:rPr lang="en-US" dirty="0"/>
+              <a:t>Mediation</a:t>
+            </a:r>
+          </a:p>
+        </p:txBody>
+      </p:sp>
+      <p:sp>
+        <p:nvSpPr>
+          <p:cNvPr id="3" name="Content Placeholder 2"/>
+          <p:cNvSpPr>
+            <a:spLocks noGrp="1"/>
+          </p:cNvSpPr>
+          <p:nvPr>
+            <p:ph idx="1"/>
+          </p:nvPr>
+        </p:nvSpPr>
+        <p:spPr>
+          <a:xfrm>
+            <a:off x="838200" y="1462768"/>
+            <a:ext cx="10515600" cy="4351338"/>
+          </a:xfrm>
+        </p:spPr>
+        <p:txBody>
+          <a:bodyPr>
+            <a:noAutofit/>
+          </a:bodyPr>
+          <a:lstStyle/>
+          <a:p>
+            <a:r>
+              <a:rPr lang="en-US" sz="3200" dirty="0"/>
+              <a:t>Refers to a situation when the relationship between a predictor variable and outcome variable can be explained by their relationship to a third variable (the mediator). </a:t>
+            </a:r>
+          </a:p>
+          <a:p>
+            <a:endParaRPr lang="en-US" sz="3200" dirty="0"/>
+          </a:p>
+          <a:p>
+            <a:r>
+              <a:rPr lang="en-US" sz="3200" b="1" dirty="0"/>
+              <a:t>Mediation</a:t>
+            </a:r>
+            <a:r>
+              <a:rPr lang="en-US" sz="3200" dirty="0"/>
+              <a:t> answers the </a:t>
+            </a:r>
+            <a:r>
+              <a:rPr lang="en-US" sz="3200" b="1" dirty="0"/>
+              <a:t>“how” </a:t>
+            </a:r>
+            <a:r>
+              <a:rPr lang="en-US" sz="3200" dirty="0"/>
+              <a:t>two variables become associated</a:t>
+            </a:r>
+          </a:p>
+          <a:p>
+            <a:endParaRPr lang="en-US" sz="3200" dirty="0"/>
+          </a:p>
+          <a:p>
+            <a:r>
+              <a:rPr lang="en-US" sz="3200" dirty="0"/>
+              <a:t>**Mediation is a causal process which requires establishing the cause and effect relation over time</a:t>
+            </a:r>
+          </a:p>
+        </p:txBody>
+      </p:sp>
+    </p:spTree>
+    <p:extLst>
+      <p:ext uri="{BB962C8B-B14F-4D97-AF65-F5344CB8AC3E}">
+        <p14:creationId xmlns:p14="http://schemas.microsoft.com/office/powerpoint/2010/main" val="560640620"/>
+      </p:ext>
+    </p:extLst>
+  </p:cSld>
+  <p:clrMapOvr>
+    <a:masterClrMapping/>
+  </p:clrMapOvr>
+  <p:timing>
+    <p:tnLst>
+      <p:par>
+        <p:cTn id="1" dur="indefinite" restart="never" nodeType="tmRoot">
+          <p:childTnLst>
+            <p:seq concurrent="1" nextAc="seek">
+              <p:cTn id="2" dur="indefinite" nodeType="mainSeq">
+                <p:childTnLst>
+                  <p:par>
+                    <p:cTn id="3" fill="hold">
+                      <p:stCondLst>
+                        <p:cond delay="indefinite"/>
+                      </p:stCondLst>
+                      <p:childTnLst>
+                        <p:par>
+                          <p:cTn id="4" fill="hold">
+                            <p:stCondLst>
+                              <p:cond delay="0"/>
+                            </p:stCondLst>
+                            <p:childTnLst>
+                              <p:par>
+                                <p:cTn id="5" presetID="1" presetClass="entr" presetSubtype="0" fill="hold" grpId="0" nodeType="clickEffect">
+                                  <p:stCondLst>
+                                    <p:cond delay="0"/>
+                                  </p:stCondLst>
+                                  <p:childTnLst>
+                                    <p:set>
+                                      <p:cBhvr>
+                                        <p:cTn id="6" dur="1" fill="hold">
+                                          <p:stCondLst>
+                                            <p:cond delay="0"/>
+                                          </p:stCondLst>
+                                        </p:cTn>
+                                        <p:tgtEl>
+                                          <p:spTgt spid="3">
+                                            <p:txEl>
+                                              <p:pRg st="0" end="0"/>
+                                            </p:txEl>
+                                          </p:spTgt>
+                                        </p:tgtEl>
+                                        <p:attrNameLst>
+                                          <p:attrName>style.visibility</p:attrName>
+                                        </p:attrNameLst>
+                                      </p:cBhvr>
+                                      <p:to>
+                                        <p:strVal val="visible"/>
+                                      </p:to>
+                                    </p:set>
+                                  </p:childTnLst>
+                                </p:cTn>
+                              </p:par>
+                            </p:childTnLst>
+                          </p:cTn>
+                        </p:par>
+                      </p:childTnLst>
+                    </p:cTn>
+                  </p:par>
+                  <p:par>
+                    <p:cTn id="7" fill="hold">
+                      <p:stCondLst>
+                        <p:cond delay="indefinite"/>
+                      </p:stCondLst>
+                      <p:childTnLst>
+                        <p:par>
+                          <p:cTn id="8" fill="hold">
+                            <p:stCondLst>
+                              <p:cond delay="0"/>
+                            </p:stCondLst>
+                            <p:childTnLst>
+                              <p:par>
+                                <p:cTn id="9" presetID="1" presetClass="entr" presetSubtype="0" fill="hold" grpId="0" nodeType="clickEffect">
+                                  <p:stCondLst>
+                                    <p:cond delay="0"/>
+                                  </p:stCondLst>
+                                  <p:childTnLst>
+                                    <p:set>
+                                      <p:cBhvr>
+                                        <p:cTn id="10" dur="1" fill="hold">
+                                          <p:stCondLst>
+                                            <p:cond delay="0"/>
+                                          </p:stCondLst>
+                                        </p:cTn>
+                                        <p:tgtEl>
+                                          <p:spTgt spid="3">
+                                            <p:txEl>
+                                              <p:pRg st="2" end="2"/>
+                                            </p:txEl>
+                                          </p:spTgt>
+                                        </p:tgtEl>
+                                        <p:attrNameLst>
+                                          <p:attrName>style.visibility</p:attrName>
+                                        </p:attrNameLst>
+                                      </p:cBhvr>
+                                      <p:to>
+                                        <p:strVal val="visible"/>
+                                      </p:to>
+                                    </p:set>
+                                  </p:childTnLst>
+                                </p:cTn>
+                              </p:par>
+                            </p:childTnLst>
+                          </p:cTn>
+                        </p:par>
+                      </p:childTnLst>
+                    </p:cTn>
+                  </p:par>
+                  <p:par>
+                    <p:cTn id="11" fill="hold">
+                      <p:stCondLst>
+                        <p:cond delay="indefinite"/>
+                      </p:stCondLst>
+                      <p:childTnLst>
+                        <p:par>
+                          <p:cTn id="12" fill="hold">
+                            <p:stCondLst>
+                              <p:cond delay="0"/>
+                            </p:stCondLst>
+                            <p:childTnLst>
+                              <p:par>
+                                <p:cTn id="13" presetID="1" presetClass="entr" presetSubtype="0" fill="hold" grpId="0" nodeType="clickEffect">
+                                  <p:stCondLst>
+                                    <p:cond delay="0"/>
+                                  </p:stCondLst>
+                                  <p:childTnLst>
+                                    <p:set>
+                                      <p:cBhvr>
+                                        <p:cTn id="14" dur="1" fill="hold">
+                                          <p:stCondLst>
+                                            <p:cond delay="0"/>
+                                          </p:stCondLst>
+                                        </p:cTn>
+                                        <p:tgtEl>
+                                          <p:spTgt spid="3">
+                                            <p:txEl>
+                                              <p:pRg st="4" end="4"/>
+                                            </p:txEl>
+                                          </p:spTgt>
+                                        </p:tgtEl>
+                                        <p:attrNameLst>
+                                          <p:attrName>style.visibility</p:attrName>
+                                        </p:attrNameLst>
+                                      </p:cBhvr>
+                                      <p:to>
+                                        <p:strVal val="visible"/>
+                                      </p:to>
+                                    </p:set>
+                                  </p:childTnLst>
+                                </p:cTn>
+                              </p:par>
+                            </p:childTnLst>
+                          </p:cTn>
+                        </p:par>
+                      </p:childTnLst>
+                    </p:cTn>
+                  </p:par>
+                </p:childTnLst>
+              </p:cTn>
+              <p:prevCondLst>
+                <p:cond evt="onPrev" delay="0">
+                  <p:tgtEl>
+                    <p:sldTgt/>
+                  </p:tgtEl>
+                </p:cond>
+              </p:prevCondLst>
+              <p:nextCondLst>
+                <p:cond evt="onNext" delay="0">
+                  <p:tgtEl>
+                    <p:sldTgt/>
+                  </p:tgtEl>
+                </p:cond>
+              </p:nextCondLst>
+            </p:seq>
+          </p:childTnLst>
+        </p:cTn>
+      </p:par>
+    </p:tnLst>
+    <p:bldLst>
+      <p:bldP spid="3" grpId="0" build="p"/>
+    </p:bldLst>
+  </p:timing>
+</p:sld>
+</file>
+
+<file path=ppt/slides/slide12.xml><?xml version="1.0" encoding="utf-8"?>
+<p:sld xmlns:a="http://schemas.openxmlformats.org/drawingml/2006/main" xmlns:r="http://schemas.openxmlformats.org/officeDocument/2006/relationships" xmlns:p="http://schemas.openxmlformats.org/presentationml/2006/main">
+  <p:cSld>
+    <p:spTree>
+      <p:nvGrpSpPr>
+        <p:cNvPr id="1" name=""/>
+        <p:cNvGrpSpPr/>
+        <p:nvPr/>
+      </p:nvGrpSpPr>
+      <p:grpSpPr>
+        <a:xfrm>
+          <a:off x="0" y="0"/>
+          <a:ext cx="0" cy="0"/>
+          <a:chOff x="0" y="0"/>
+          <a:chExt cx="0" cy="0"/>
+        </a:xfrm>
+      </p:grpSpPr>
       <p:pic>
         <p:nvPicPr>
           <p:cNvPr id="4" name="Picture 3"/>
@@ -4842,8 +5154,8 @@
           </a:p>
         </p:txBody>
       </p:sp>
-      <mc:AlternateContent xmlns:mc="http://schemas.openxmlformats.org/markup-compatibility/2006">
-        <mc:Choice xmlns:p14="http://schemas.microsoft.com/office/powerpoint/2010/main" Requires="p14">
+      <mc:AlternateContent xmlns:mc="http://schemas.openxmlformats.org/markup-compatibility/2006" xmlns:p14="http://schemas.microsoft.com/office/powerpoint/2010/main">
+        <mc:Choice Requires="p14">
           <p:contentPart p14:bwMode="auto" r:id="rId3">
             <p14:nvContentPartPr>
               <p14:cNvPr id="3" name="Ink 2">
@@ -4862,7 +5174,7 @@
             </p14:xfrm>
           </p:contentPart>
         </mc:Choice>
-        <mc:Fallback>
+        <mc:Fallback xmlns="">
           <p:pic>
             <p:nvPicPr>
               <p:cNvPr id="3" name="Ink 2">
@@ -4906,7 +5218,7 @@
 </p:sld>
 </file>
 
-<file path=ppt/slides/slide12.xml><?xml version="1.0" encoding="utf-8"?>
+<file path=ppt/slides/slide13.xml><?xml version="1.0" encoding="utf-8"?>
 <p:sld xmlns:a="http://schemas.openxmlformats.org/drawingml/2006/main" xmlns:r="http://schemas.openxmlformats.org/officeDocument/2006/relationships" xmlns:p="http://schemas.openxmlformats.org/presentationml/2006/main">
   <p:cSld>
     <p:spTree>
@@ -5204,7 +5516,7 @@
 </p:sld>
 </file>
 
-<file path=ppt/slides/slide13.xml><?xml version="1.0" encoding="utf-8"?>
+<file path=ppt/slides/slide14.xml><?xml version="1.0" encoding="utf-8"?>
 <p:sld xmlns:a="http://schemas.openxmlformats.org/drawingml/2006/main" xmlns:r="http://schemas.openxmlformats.org/officeDocument/2006/relationships" xmlns:p="http://schemas.openxmlformats.org/presentationml/2006/main">
   <p:cSld>
     <p:spTree>
@@ -5684,7 +5996,7 @@
 </p:sld>
 </file>
 
-<file path=ppt/slides/slide14.xml><?xml version="1.0" encoding="utf-8"?>
+<file path=ppt/slides/slide15.xml><?xml version="1.0" encoding="utf-8"?>
 <p:sld xmlns:a="http://schemas.openxmlformats.org/drawingml/2006/main" xmlns:r="http://schemas.openxmlformats.org/officeDocument/2006/relationships" xmlns:p="http://schemas.openxmlformats.org/presentationml/2006/main">
   <p:cSld>
     <p:spTree>
@@ -6227,7 +6539,7 @@
 </p:sld>
 </file>
 
-<file path=ppt/slides/slide15.xml><?xml version="1.0" encoding="utf-8"?>
+<file path=ppt/slides/slide16.xml><?xml version="1.0" encoding="utf-8"?>
 <p:sld xmlns:a="http://schemas.openxmlformats.org/drawingml/2006/main" xmlns:r="http://schemas.openxmlformats.org/officeDocument/2006/relationships" xmlns:p="http://schemas.openxmlformats.org/presentationml/2006/main">
   <p:cSld>
     <p:spTree>
@@ -6383,8 +6695,8 @@
           </a:fontRef>
         </p:style>
       </p:cxnSp>
-      <mc:AlternateContent xmlns:mc="http://schemas.openxmlformats.org/markup-compatibility/2006">
-        <mc:Choice xmlns:p14="http://schemas.microsoft.com/office/powerpoint/2010/main" Requires="p14">
+      <mc:AlternateContent xmlns:mc="http://schemas.openxmlformats.org/markup-compatibility/2006" xmlns:p14="http://schemas.microsoft.com/office/powerpoint/2010/main">
+        <mc:Choice Requires="p14">
           <p:contentPart p14:bwMode="auto" r:id="rId3">
             <p14:nvContentPartPr>
               <p14:cNvPr id="5" name="Ink 4">
@@ -6403,7 +6715,7 @@
             </p14:xfrm>
           </p:contentPart>
         </mc:Choice>
-        <mc:Fallback>
+        <mc:Fallback xmlns="">
           <p:pic>
             <p:nvPicPr>
               <p:cNvPr id="5" name="Ink 4">
@@ -6522,7 +6834,7 @@
 </p:sld>
 </file>
 
-<file path=ppt/slides/slide16.xml><?xml version="1.0" encoding="utf-8"?>
+<file path=ppt/slides/slide17.xml><?xml version="1.0" encoding="utf-8"?>
 <p:sld xmlns:a="http://schemas.openxmlformats.org/drawingml/2006/main" xmlns:r="http://schemas.openxmlformats.org/officeDocument/2006/relationships" xmlns:p="http://schemas.openxmlformats.org/presentationml/2006/main">
   <p:cSld>
     <p:spTree>
@@ -6694,8 +7006,8 @@
           </a:fontRef>
         </p:style>
       </p:cxnSp>
-      <mc:AlternateContent xmlns:mc="http://schemas.openxmlformats.org/markup-compatibility/2006">
-        <mc:Choice xmlns:p14="http://schemas.microsoft.com/office/powerpoint/2010/main" Requires="p14">
+      <mc:AlternateContent xmlns:mc="http://schemas.openxmlformats.org/markup-compatibility/2006" xmlns:p14="http://schemas.microsoft.com/office/powerpoint/2010/main">
+        <mc:Choice Requires="p14">
           <p:contentPart p14:bwMode="auto" r:id="rId3">
             <p14:nvContentPartPr>
               <p14:cNvPr id="5" name="Ink 4">
@@ -6714,7 +7026,7 @@
             </p14:xfrm>
           </p:contentPart>
         </mc:Choice>
-        <mc:Fallback>
+        <mc:Fallback xmlns="">
           <p:pic>
             <p:nvPicPr>
               <p:cNvPr id="5" name="Ink 4">
@@ -6833,7 +7145,7 @@
 </p:sld>
 </file>
 
-<file path=ppt/slides/slide17.xml><?xml version="1.0" encoding="utf-8"?>
+<file path=ppt/slides/slide18.xml><?xml version="1.0" encoding="utf-8"?>
 <p:sld xmlns:a="http://schemas.openxmlformats.org/drawingml/2006/main" xmlns:r="http://schemas.openxmlformats.org/officeDocument/2006/relationships" xmlns:p="http://schemas.openxmlformats.org/presentationml/2006/main">
   <p:cSld>
     <p:spTree>
@@ -7062,8 +7374,8 @@
           </a:fontRef>
         </p:style>
       </p:cxnSp>
-      <mc:AlternateContent xmlns:mc="http://schemas.openxmlformats.org/markup-compatibility/2006">
-        <mc:Choice xmlns:p14="http://schemas.microsoft.com/office/powerpoint/2010/main" Requires="p14">
+      <mc:AlternateContent xmlns:mc="http://schemas.openxmlformats.org/markup-compatibility/2006" xmlns:p14="http://schemas.microsoft.com/office/powerpoint/2010/main">
+        <mc:Choice Requires="p14">
           <p:contentPart p14:bwMode="auto" r:id="rId3">
             <p14:nvContentPartPr>
               <p14:cNvPr id="5" name="Ink 4">
@@ -7082,7 +7394,7 @@
             </p14:xfrm>
           </p:contentPart>
         </mc:Choice>
-        <mc:Fallback>
+        <mc:Fallback xmlns="">
           <p:pic>
             <p:nvPicPr>
               <p:cNvPr id="5" name="Ink 4">
@@ -7228,7 +7540,7 @@
 </p:sld>
 </file>
 
-<file path=ppt/slides/slide18.xml><?xml version="1.0" encoding="utf-8"?>
+<file path=ppt/slides/slide19.xml><?xml version="1.0" encoding="utf-8"?>
 <p:sld xmlns:a="http://schemas.openxmlformats.org/drawingml/2006/main" xmlns:r="http://schemas.openxmlformats.org/officeDocument/2006/relationships" xmlns:p="http://schemas.openxmlformats.org/presentationml/2006/main">
   <p:cSld>
     <p:spTree>
@@ -7575,7 +7887,107 @@
 </p:sld>
 </file>
 
-<file path=ppt/slides/slide19.xml><?xml version="1.0" encoding="utf-8"?>
+<file path=ppt/slides/slide2.xml><?xml version="1.0" encoding="utf-8"?>
+<p:sld xmlns:a="http://schemas.openxmlformats.org/drawingml/2006/main" xmlns:r="http://schemas.openxmlformats.org/officeDocument/2006/relationships" xmlns:p="http://schemas.openxmlformats.org/presentationml/2006/main">
+  <p:cSld>
+    <p:spTree>
+      <p:nvGrpSpPr>
+        <p:cNvPr id="1" name=""/>
+        <p:cNvGrpSpPr/>
+        <p:nvPr/>
+      </p:nvGrpSpPr>
+      <p:grpSpPr>
+        <a:xfrm>
+          <a:off x="0" y="0"/>
+          <a:ext cx="0" cy="0"/>
+          <a:chOff x="0" y="0"/>
+          <a:chExt cx="0" cy="0"/>
+        </a:xfrm>
+      </p:grpSpPr>
+      <p:sp>
+        <p:nvSpPr>
+          <p:cNvPr id="2" name="Title 1"/>
+          <p:cNvSpPr>
+            <a:spLocks noGrp="1"/>
+          </p:cNvSpPr>
+          <p:nvPr>
+            <p:ph type="ctrTitle"/>
+          </p:nvPr>
+        </p:nvSpPr>
+        <p:spPr/>
+        <p:txBody>
+          <a:bodyPr>
+            <a:normAutofit/>
+          </a:bodyPr>
+          <a:lstStyle/>
+          <a:p>
+            <a:r>
+              <a:rPr lang="en-GB" dirty="0"/>
+              <a:t>Mediation and Moderation</a:t>
+            </a:r>
+          </a:p>
+        </p:txBody>
+      </p:sp>
+      <p:sp>
+        <p:nvSpPr>
+          <p:cNvPr id="3" name="Subtitle 2"/>
+          <p:cNvSpPr>
+            <a:spLocks noGrp="1"/>
+          </p:cNvSpPr>
+          <p:nvPr>
+            <p:ph type="subTitle" idx="1"/>
+          </p:nvPr>
+        </p:nvSpPr>
+        <p:spPr>
+          <a:xfrm>
+            <a:off x="1524000" y="3869324"/>
+            <a:ext cx="9144000" cy="1655762"/>
+          </a:xfrm>
+        </p:spPr>
+        <p:txBody>
+          <a:bodyPr/>
+          <a:lstStyle/>
+          <a:p>
+            <a:r>
+              <a:rPr lang="en-GB" dirty="0"/>
+              <a:t>Jamil </a:t>
+            </a:r>
+            <a:r>
+              <a:rPr lang="en-GB" dirty="0" err="1"/>
+              <a:t>Bhanji</a:t>
+            </a:r>
+            <a:endParaRPr lang="en-GB" dirty="0"/>
+          </a:p>
+          <a:p>
+            <a:r>
+              <a:rPr lang="en-GB" dirty="0"/>
+              <a:t>with help from Vanessa </a:t>
+            </a:r>
+            <a:r>
+              <a:rPr lang="en-GB" dirty="0" err="1"/>
+              <a:t>Lobue</a:t>
+            </a:r>
+            <a:r>
+              <a:rPr lang="en-GB" dirty="0"/>
+              <a:t> and Andy Field</a:t>
+            </a:r>
+          </a:p>
+        </p:txBody>
+      </p:sp>
+    </p:spTree>
+    <p:extLst>
+      <p:ext uri="{BB962C8B-B14F-4D97-AF65-F5344CB8AC3E}">
+        <p14:creationId xmlns:p14="http://schemas.microsoft.com/office/powerpoint/2010/main" val="907586198"/>
+      </p:ext>
+    </p:extLst>
+  </p:cSld>
+  <p:clrMapOvr>
+    <a:masterClrMapping/>
+  </p:clrMapOvr>
+</p:sld>
+</file>
+
+<file path=ppt/slides/slide20.xml><?xml version="1.0" encoding="utf-8"?>
 <p:sld xmlns:a="http://schemas.openxmlformats.org/drawingml/2006/main" xmlns:r="http://schemas.openxmlformats.org/officeDocument/2006/relationships" xmlns:p="http://schemas.openxmlformats.org/presentationml/2006/main">
   <p:cSld>
     <p:spTree>
@@ -7744,8 +8156,8 @@
           </a:fontRef>
         </p:style>
       </p:cxnSp>
-      <mc:AlternateContent xmlns:mc="http://schemas.openxmlformats.org/markup-compatibility/2006">
-        <mc:Choice xmlns:p14="http://schemas.microsoft.com/office/powerpoint/2010/main" Requires="p14">
+      <mc:AlternateContent xmlns:mc="http://schemas.openxmlformats.org/markup-compatibility/2006" xmlns:p14="http://schemas.microsoft.com/office/powerpoint/2010/main">
+        <mc:Choice Requires="p14">
           <p:contentPart p14:bwMode="auto" r:id="rId3">
             <p14:nvContentPartPr>
               <p14:cNvPr id="6" name="Ink 5">
@@ -7764,7 +8176,7 @@
             </p14:xfrm>
           </p:contentPart>
         </mc:Choice>
-        <mc:Fallback>
+        <mc:Fallback xmlns="">
           <p:pic>
             <p:nvPicPr>
               <p:cNvPr id="6" name="Ink 5">
@@ -7883,7 +8295,1893 @@
 </p:sld>
 </file>
 
-<file path=ppt/slides/slide2.xml><?xml version="1.0" encoding="utf-8"?>
+<file path=ppt/slides/slide21.xml><?xml version="1.0" encoding="utf-8"?>
+<p:sld xmlns:a="http://schemas.openxmlformats.org/drawingml/2006/main" xmlns:r="http://schemas.openxmlformats.org/officeDocument/2006/relationships" xmlns:p="http://schemas.openxmlformats.org/presentationml/2006/main">
+  <p:cSld>
+    <p:spTree>
+      <p:nvGrpSpPr>
+        <p:cNvPr id="1" name=""/>
+        <p:cNvGrpSpPr/>
+        <p:nvPr/>
+      </p:nvGrpSpPr>
+      <p:grpSpPr>
+        <a:xfrm>
+          <a:off x="0" y="0"/>
+          <a:ext cx="0" cy="0"/>
+          <a:chOff x="0" y="0"/>
+          <a:chExt cx="0" cy="0"/>
+        </a:xfrm>
+      </p:grpSpPr>
+      <p:sp>
+        <p:nvSpPr>
+          <p:cNvPr id="2" name="Title 1"/>
+          <p:cNvSpPr>
+            <a:spLocks noGrp="1"/>
+          </p:cNvSpPr>
+          <p:nvPr>
+            <p:ph type="title"/>
+          </p:nvPr>
+        </p:nvSpPr>
+        <p:spPr/>
+        <p:txBody>
+          <a:bodyPr/>
+          <a:lstStyle/>
+          <a:p>
+            <a:r>
+              <a:rPr lang="en-US" dirty="0"/>
+              <a:t>Baron &amp; Kenny, (1986) </a:t>
+            </a:r>
+          </a:p>
+        </p:txBody>
+      </p:sp>
+      <p:sp>
+        <p:nvSpPr>
+          <p:cNvPr id="3" name="Content Placeholder 2"/>
+          <p:cNvSpPr>
+            <a:spLocks noGrp="1"/>
+          </p:cNvSpPr>
+          <p:nvPr>
+            <p:ph idx="1"/>
+          </p:nvPr>
+        </p:nvSpPr>
+        <p:spPr>
+          <a:xfrm>
+            <a:off x="986971" y="1600200"/>
+            <a:ext cx="4093029" cy="4724400"/>
+          </a:xfrm>
+        </p:spPr>
+        <p:txBody>
+          <a:bodyPr>
+            <a:normAutofit/>
+          </a:bodyPr>
+          <a:lstStyle/>
+          <a:p>
+            <a:r>
+              <a:rPr lang="en-GB" sz="3700" dirty="0"/>
+              <a:t>Four conditions of mediation: </a:t>
+            </a:r>
+          </a:p>
+          <a:p>
+            <a:pPr marL="457200" lvl="1" indent="0">
+              <a:buNone/>
+            </a:pPr>
+            <a:r>
+              <a:rPr lang="en-GB" sz="3700" dirty="0"/>
+              <a:t>3. The mediator must significantly predict the outcome variable.</a:t>
+            </a:r>
+          </a:p>
+          <a:p>
+            <a:endParaRPr lang="en-US" sz="3200" dirty="0"/>
+          </a:p>
+        </p:txBody>
+      </p:sp>
+      <p:pic>
+        <p:nvPicPr>
+          <p:cNvPr id="4" name="Picture 3">
+            <a:extLst>
+              <a:ext uri="{FF2B5EF4-FFF2-40B4-BE49-F238E27FC236}">
+                <a16:creationId xmlns:a16="http://schemas.microsoft.com/office/drawing/2014/main" id="{072B4491-614C-8242-A1CF-4F5BF9741262}"/>
+              </a:ext>
+            </a:extLst>
+          </p:cNvPr>
+          <p:cNvPicPr>
+            <a:picLocks noChangeAspect="1"/>
+          </p:cNvPicPr>
+          <p:nvPr/>
+        </p:nvPicPr>
+        <p:blipFill>
+          <a:blip r:embed="rId2">
+            <a:extLst>
+              <a:ext uri="{28A0092B-C50C-407E-A947-70E740481C1C}">
+                <a14:useLocalDpi xmlns:a14="http://schemas.microsoft.com/office/drawing/2010/main" val="0"/>
+              </a:ext>
+            </a:extLst>
+          </a:blip>
+          <a:stretch>
+            <a:fillRect/>
+          </a:stretch>
+        </p:blipFill>
+        <p:spPr>
+          <a:xfrm>
+            <a:off x="5452042" y="1556657"/>
+            <a:ext cx="5616802" cy="4629020"/>
+          </a:xfrm>
+          <a:prstGeom prst="rect">
+            <a:avLst/>
+          </a:prstGeom>
+        </p:spPr>
+      </p:pic>
+      <p:cxnSp>
+        <p:nvCxnSpPr>
+          <p:cNvPr id="5" name="Straight Arrow Connector 4">
+            <a:extLst>
+              <a:ext uri="{FF2B5EF4-FFF2-40B4-BE49-F238E27FC236}">
+                <a16:creationId xmlns:a16="http://schemas.microsoft.com/office/drawing/2014/main" id="{ADC6FB27-A299-3245-8F0B-3CA5054E7A00}"/>
+              </a:ext>
+            </a:extLst>
+          </p:cNvPr>
+          <p:cNvCxnSpPr>
+            <a:cxnSpLocks/>
+          </p:cNvCxnSpPr>
+          <p:nvPr/>
+        </p:nvCxnSpPr>
+        <p:spPr>
+          <a:xfrm>
+            <a:off x="9269073" y="4085771"/>
+            <a:ext cx="876413" cy="856343"/>
+          </a:xfrm>
+          <a:prstGeom prst="straightConnector1">
+            <a:avLst/>
+          </a:prstGeom>
+          <a:ln w="76200">
+            <a:solidFill>
+              <a:srgbClr val="FF0000"/>
+            </a:solidFill>
+            <a:tailEnd type="triangle"/>
+          </a:ln>
+        </p:spPr>
+        <p:style>
+          <a:lnRef idx="1">
+            <a:schemeClr val="accent1"/>
+          </a:lnRef>
+          <a:fillRef idx="0">
+            <a:schemeClr val="accent1"/>
+          </a:fillRef>
+          <a:effectRef idx="0">
+            <a:schemeClr val="accent1"/>
+          </a:effectRef>
+          <a:fontRef idx="minor">
+            <a:schemeClr val="tx1"/>
+          </a:fontRef>
+        </p:style>
+      </p:cxnSp>
+      <mc:AlternateContent xmlns:mc="http://schemas.openxmlformats.org/markup-compatibility/2006" xmlns:p14="http://schemas.microsoft.com/office/powerpoint/2010/main">
+        <mc:Choice Requires="p14">
+          <p:contentPart p14:bwMode="auto" r:id="rId3">
+            <p14:nvContentPartPr>
+              <p14:cNvPr id="6" name="Ink 5">
+                <a:extLst>
+                  <a:ext uri="{FF2B5EF4-FFF2-40B4-BE49-F238E27FC236}">
+                    <a16:creationId xmlns:a16="http://schemas.microsoft.com/office/drawing/2014/main" id="{7BA191A3-1B3B-BE8E-F371-526025798163}"/>
+                  </a:ext>
+                </a:extLst>
+              </p14:cNvPr>
+              <p14:cNvContentPartPr/>
+              <p14:nvPr/>
+            </p14:nvContentPartPr>
+            <p14:xfrm>
+              <a:off x="9619920" y="4280040"/>
+              <a:ext cx="521280" cy="343080"/>
+            </p14:xfrm>
+          </p:contentPart>
+        </mc:Choice>
+        <mc:Fallback xmlns="">
+          <p:pic>
+            <p:nvPicPr>
+              <p:cNvPr id="6" name="Ink 5">
+                <a:extLst>
+                  <a:ext uri="{FF2B5EF4-FFF2-40B4-BE49-F238E27FC236}">
+                    <a16:creationId xmlns:a16="http://schemas.microsoft.com/office/drawing/2014/main" id="{7BA191A3-1B3B-BE8E-F371-526025798163}"/>
+                  </a:ext>
+                </a:extLst>
+              </p:cNvPr>
+              <p:cNvPicPr/>
+              <p:nvPr/>
+            </p:nvPicPr>
+            <p:blipFill>
+              <a:blip r:embed="rId4"/>
+              <a:stretch>
+                <a:fillRect/>
+              </a:stretch>
+            </p:blipFill>
+            <p:spPr>
+              <a:xfrm>
+                <a:off x="9610560" y="4270680"/>
+                <a:ext cx="540000" cy="361800"/>
+              </a:xfrm>
+              <a:prstGeom prst="rect">
+                <a:avLst/>
+              </a:prstGeom>
+            </p:spPr>
+          </p:pic>
+        </mc:Fallback>
+      </mc:AlternateContent>
+    </p:spTree>
+    <p:extLst>
+      <p:ext uri="{BB962C8B-B14F-4D97-AF65-F5344CB8AC3E}">
+        <p14:creationId xmlns:p14="http://schemas.microsoft.com/office/powerpoint/2010/main" val="2844678668"/>
+      </p:ext>
+    </p:extLst>
+  </p:cSld>
+  <p:clrMapOvr>
+    <a:masterClrMapping/>
+  </p:clrMapOvr>
+  <p:timing>
+    <p:tnLst>
+      <p:par>
+        <p:cTn id="1" dur="indefinite" restart="never" nodeType="tmRoot">
+          <p:childTnLst>
+            <p:seq concurrent="1" nextAc="seek">
+              <p:cTn id="2" dur="indefinite" nodeType="mainSeq">
+                <p:childTnLst>
+                  <p:par>
+                    <p:cTn id="3" fill="hold">
+                      <p:stCondLst>
+                        <p:cond delay="indefinite"/>
+                      </p:stCondLst>
+                      <p:childTnLst>
+                        <p:par>
+                          <p:cTn id="4" fill="hold">
+                            <p:stCondLst>
+                              <p:cond delay="0"/>
+                            </p:stCondLst>
+                            <p:childTnLst>
+                              <p:par>
+                                <p:cTn id="5" presetID="1" presetClass="entr" presetSubtype="0" fill="hold" nodeType="clickEffect">
+                                  <p:stCondLst>
+                                    <p:cond delay="0"/>
+                                  </p:stCondLst>
+                                  <p:childTnLst>
+                                    <p:set>
+                                      <p:cBhvr>
+                                        <p:cTn id="6" dur="1" fill="hold">
+                                          <p:stCondLst>
+                                            <p:cond delay="0"/>
+                                          </p:stCondLst>
+                                        </p:cTn>
+                                        <p:tgtEl>
+                                          <p:spTgt spid="5"/>
+                                        </p:tgtEl>
+                                        <p:attrNameLst>
+                                          <p:attrName>style.visibility</p:attrName>
+                                        </p:attrNameLst>
+                                      </p:cBhvr>
+                                      <p:to>
+                                        <p:strVal val="visible"/>
+                                      </p:to>
+                                    </p:set>
+                                  </p:childTnLst>
+                                </p:cTn>
+                              </p:par>
+                            </p:childTnLst>
+                          </p:cTn>
+                        </p:par>
+                      </p:childTnLst>
+                    </p:cTn>
+                  </p:par>
+                </p:childTnLst>
+              </p:cTn>
+              <p:prevCondLst>
+                <p:cond evt="onPrev" delay="0">
+                  <p:tgtEl>
+                    <p:sldTgt/>
+                  </p:tgtEl>
+                </p:cond>
+              </p:prevCondLst>
+              <p:nextCondLst>
+                <p:cond evt="onNext" delay="0">
+                  <p:tgtEl>
+                    <p:sldTgt/>
+                  </p:tgtEl>
+                </p:cond>
+              </p:nextCondLst>
+            </p:seq>
+          </p:childTnLst>
+        </p:cTn>
+      </p:par>
+    </p:tnLst>
+  </p:timing>
+</p:sld>
+</file>
+
+<file path=ppt/slides/slide22.xml><?xml version="1.0" encoding="utf-8"?>
+<p:sld xmlns:a="http://schemas.openxmlformats.org/drawingml/2006/main" xmlns:r="http://schemas.openxmlformats.org/officeDocument/2006/relationships" xmlns:p="http://schemas.openxmlformats.org/presentationml/2006/main">
+  <p:cSld>
+    <p:spTree>
+      <p:nvGrpSpPr>
+        <p:cNvPr id="1" name=""/>
+        <p:cNvGrpSpPr/>
+        <p:nvPr/>
+      </p:nvGrpSpPr>
+      <p:grpSpPr>
+        <a:xfrm>
+          <a:off x="0" y="0"/>
+          <a:ext cx="0" cy="0"/>
+          <a:chOff x="0" y="0"/>
+          <a:chExt cx="0" cy="0"/>
+        </a:xfrm>
+      </p:grpSpPr>
+      <p:sp>
+        <p:nvSpPr>
+          <p:cNvPr id="2" name="Title 1"/>
+          <p:cNvSpPr>
+            <a:spLocks noGrp="1"/>
+          </p:cNvSpPr>
+          <p:nvPr>
+            <p:ph type="title"/>
+          </p:nvPr>
+        </p:nvSpPr>
+        <p:spPr/>
+        <p:txBody>
+          <a:bodyPr/>
+          <a:lstStyle/>
+          <a:p>
+            <a:r>
+              <a:rPr lang="en-US" dirty="0"/>
+              <a:t>Baron &amp; Kenny, (1986) </a:t>
+            </a:r>
+          </a:p>
+        </p:txBody>
+      </p:sp>
+      <p:sp>
+        <p:nvSpPr>
+          <p:cNvPr id="3" name="Content Placeholder 2"/>
+          <p:cNvSpPr>
+            <a:spLocks noGrp="1"/>
+          </p:cNvSpPr>
+          <p:nvPr>
+            <p:ph idx="1"/>
+          </p:nvPr>
+        </p:nvSpPr>
+        <p:spPr>
+          <a:xfrm>
+            <a:off x="986971" y="1600200"/>
+            <a:ext cx="4093029" cy="4724400"/>
+          </a:xfrm>
+        </p:spPr>
+        <p:txBody>
+          <a:bodyPr>
+            <a:normAutofit lnSpcReduction="10000"/>
+          </a:bodyPr>
+          <a:lstStyle/>
+          <a:p>
+            <a:r>
+              <a:rPr lang="en-GB" sz="3700" dirty="0"/>
+              <a:t>Four conditions of mediation: </a:t>
+            </a:r>
+          </a:p>
+          <a:p>
+            <a:pPr marL="457200" lvl="1" indent="0">
+              <a:buNone/>
+            </a:pPr>
+            <a:r>
+              <a:rPr lang="en-GB" sz="3700" dirty="0"/>
+              <a:t>4. The predictor variable must predict the outcome variable less strongly in model 3 than in model 1.</a:t>
+            </a:r>
+          </a:p>
+          <a:p>
+            <a:endParaRPr lang="en-US" sz="3200" dirty="0"/>
+          </a:p>
+        </p:txBody>
+      </p:sp>
+      <p:pic>
+        <p:nvPicPr>
+          <p:cNvPr id="4" name="Picture 3">
+            <a:extLst>
+              <a:ext uri="{FF2B5EF4-FFF2-40B4-BE49-F238E27FC236}">
+                <a16:creationId xmlns:a16="http://schemas.microsoft.com/office/drawing/2014/main" id="{072B4491-614C-8242-A1CF-4F5BF9741262}"/>
+              </a:ext>
+            </a:extLst>
+          </p:cNvPr>
+          <p:cNvPicPr>
+            <a:picLocks noChangeAspect="1"/>
+          </p:cNvPicPr>
+          <p:nvPr/>
+        </p:nvPicPr>
+        <p:blipFill>
+          <a:blip r:embed="rId2">
+            <a:extLst>
+              <a:ext uri="{28A0092B-C50C-407E-A947-70E740481C1C}">
+                <a14:useLocalDpi xmlns:a14="http://schemas.microsoft.com/office/drawing/2010/main" val="0"/>
+              </a:ext>
+            </a:extLst>
+          </a:blip>
+          <a:stretch>
+            <a:fillRect/>
+          </a:stretch>
+        </p:blipFill>
+        <p:spPr>
+          <a:xfrm>
+            <a:off x="5452042" y="1556657"/>
+            <a:ext cx="5616802" cy="4629020"/>
+          </a:xfrm>
+          <a:prstGeom prst="rect">
+            <a:avLst/>
+          </a:prstGeom>
+        </p:spPr>
+      </p:pic>
+      <p:cxnSp>
+        <p:nvCxnSpPr>
+          <p:cNvPr id="5" name="Straight Arrow Connector 4">
+            <a:extLst>
+              <a:ext uri="{FF2B5EF4-FFF2-40B4-BE49-F238E27FC236}">
+                <a16:creationId xmlns:a16="http://schemas.microsoft.com/office/drawing/2014/main" id="{D14AB6C8-78E1-DE44-993C-D1CF954CD649}"/>
+              </a:ext>
+            </a:extLst>
+          </p:cNvPr>
+          <p:cNvCxnSpPr/>
+          <p:nvPr/>
+        </p:nvCxnSpPr>
+        <p:spPr>
+          <a:xfrm>
+            <a:off x="7460343" y="5152571"/>
+            <a:ext cx="1799771" cy="0"/>
+          </a:xfrm>
+          <a:prstGeom prst="straightConnector1">
+            <a:avLst/>
+          </a:prstGeom>
+          <a:ln w="76200">
+            <a:solidFill>
+              <a:schemeClr val="accent1"/>
+            </a:solidFill>
+            <a:tailEnd type="triangle"/>
+          </a:ln>
+        </p:spPr>
+        <p:style>
+          <a:lnRef idx="1">
+            <a:schemeClr val="accent1"/>
+          </a:lnRef>
+          <a:fillRef idx="0">
+            <a:schemeClr val="accent1"/>
+          </a:fillRef>
+          <a:effectRef idx="0">
+            <a:schemeClr val="accent1"/>
+          </a:effectRef>
+          <a:fontRef idx="minor">
+            <a:schemeClr val="tx1"/>
+          </a:fontRef>
+        </p:style>
+      </p:cxnSp>
+      <p:cxnSp>
+        <p:nvCxnSpPr>
+          <p:cNvPr id="6" name="Straight Arrow Connector 5">
+            <a:extLst>
+              <a:ext uri="{FF2B5EF4-FFF2-40B4-BE49-F238E27FC236}">
+                <a16:creationId xmlns:a16="http://schemas.microsoft.com/office/drawing/2014/main" id="{82953B9A-CD3A-5447-BFE8-E815ABB07701}"/>
+              </a:ext>
+            </a:extLst>
+          </p:cNvPr>
+          <p:cNvCxnSpPr>
+            <a:cxnSpLocks/>
+          </p:cNvCxnSpPr>
+          <p:nvPr/>
+        </p:nvCxnSpPr>
+        <p:spPr>
+          <a:xfrm>
+            <a:off x="9269073" y="4085771"/>
+            <a:ext cx="876413" cy="856343"/>
+          </a:xfrm>
+          <a:prstGeom prst="straightConnector1">
+            <a:avLst/>
+          </a:prstGeom>
+          <a:ln w="76200">
+            <a:solidFill>
+              <a:srgbClr val="FF0000"/>
+            </a:solidFill>
+            <a:tailEnd type="triangle"/>
+          </a:ln>
+        </p:spPr>
+        <p:style>
+          <a:lnRef idx="1">
+            <a:schemeClr val="accent1"/>
+          </a:lnRef>
+          <a:fillRef idx="0">
+            <a:schemeClr val="accent1"/>
+          </a:fillRef>
+          <a:effectRef idx="0">
+            <a:schemeClr val="accent1"/>
+          </a:effectRef>
+          <a:fontRef idx="minor">
+            <a:schemeClr val="tx1"/>
+          </a:fontRef>
+        </p:style>
+      </p:cxnSp>
+      <mc:AlternateContent xmlns:mc="http://schemas.openxmlformats.org/markup-compatibility/2006" xmlns:p14="http://schemas.microsoft.com/office/powerpoint/2010/main">
+        <mc:Choice Requires="p14">
+          <p:contentPart p14:bwMode="auto" r:id="rId3">
+            <p14:nvContentPartPr>
+              <p14:cNvPr id="7" name="Ink 6">
+                <a:extLst>
+                  <a:ext uri="{FF2B5EF4-FFF2-40B4-BE49-F238E27FC236}">
+                    <a16:creationId xmlns:a16="http://schemas.microsoft.com/office/drawing/2014/main" id="{EAD92767-1707-A018-49C3-AFE3E5B81883}"/>
+                  </a:ext>
+                </a:extLst>
+              </p14:cNvPr>
+              <p14:cNvContentPartPr/>
+              <p14:nvPr/>
+            </p14:nvContentPartPr>
+            <p14:xfrm>
+              <a:off x="8115480" y="2234520"/>
+              <a:ext cx="628920" cy="3366720"/>
+            </p14:xfrm>
+          </p:contentPart>
+        </mc:Choice>
+        <mc:Fallback xmlns="">
+          <p:pic>
+            <p:nvPicPr>
+              <p:cNvPr id="7" name="Ink 6">
+                <a:extLst>
+                  <a:ext uri="{FF2B5EF4-FFF2-40B4-BE49-F238E27FC236}">
+                    <a16:creationId xmlns:a16="http://schemas.microsoft.com/office/drawing/2014/main" id="{EAD92767-1707-A018-49C3-AFE3E5B81883}"/>
+                  </a:ext>
+                </a:extLst>
+              </p:cNvPr>
+              <p:cNvPicPr/>
+              <p:nvPr/>
+            </p:nvPicPr>
+            <p:blipFill>
+              <a:blip r:embed="rId4"/>
+              <a:stretch>
+                <a:fillRect/>
+              </a:stretch>
+            </p:blipFill>
+            <p:spPr>
+              <a:xfrm>
+                <a:off x="8106120" y="2225160"/>
+                <a:ext cx="647640" cy="3385440"/>
+              </a:xfrm>
+              <a:prstGeom prst="rect">
+                <a:avLst/>
+              </a:prstGeom>
+            </p:spPr>
+          </p:pic>
+        </mc:Fallback>
+      </mc:AlternateContent>
+    </p:spTree>
+    <p:extLst>
+      <p:ext uri="{BB962C8B-B14F-4D97-AF65-F5344CB8AC3E}">
+        <p14:creationId xmlns:p14="http://schemas.microsoft.com/office/powerpoint/2010/main" val="455499502"/>
+      </p:ext>
+    </p:extLst>
+  </p:cSld>
+  <p:clrMapOvr>
+    <a:masterClrMapping/>
+  </p:clrMapOvr>
+</p:sld>
+</file>
+
+<file path=ppt/slides/slide23.xml><?xml version="1.0" encoding="utf-8"?>
+<p:sld xmlns:a="http://schemas.openxmlformats.org/drawingml/2006/main" xmlns:r="http://schemas.openxmlformats.org/officeDocument/2006/relationships" xmlns:p="http://schemas.openxmlformats.org/presentationml/2006/main">
+  <p:cSld>
+    <p:spTree>
+      <p:nvGrpSpPr>
+        <p:cNvPr id="1" name=""/>
+        <p:cNvGrpSpPr/>
+        <p:nvPr/>
+      </p:nvGrpSpPr>
+      <p:grpSpPr>
+        <a:xfrm>
+          <a:off x="0" y="0"/>
+          <a:ext cx="0" cy="0"/>
+          <a:chOff x="0" y="0"/>
+          <a:chExt cx="0" cy="0"/>
+        </a:xfrm>
+      </p:grpSpPr>
+      <p:sp>
+        <p:nvSpPr>
+          <p:cNvPr id="2" name="Title 1"/>
+          <p:cNvSpPr>
+            <a:spLocks noGrp="1"/>
+          </p:cNvSpPr>
+          <p:nvPr>
+            <p:ph type="title"/>
+          </p:nvPr>
+        </p:nvSpPr>
+        <p:spPr/>
+        <p:txBody>
+          <a:bodyPr/>
+          <a:lstStyle/>
+          <a:p>
+            <a:r>
+              <a:rPr lang="en-US" dirty="0"/>
+              <a:t>Baron &amp; Kenny, (1986) </a:t>
+            </a:r>
+          </a:p>
+        </p:txBody>
+      </p:sp>
+      <p:sp>
+        <p:nvSpPr>
+          <p:cNvPr id="3" name="Content Placeholder 2"/>
+          <p:cNvSpPr>
+            <a:spLocks noGrp="1"/>
+          </p:cNvSpPr>
+          <p:nvPr>
+            <p:ph idx="1"/>
+          </p:nvPr>
+        </p:nvSpPr>
+        <p:spPr>
+          <a:xfrm>
+            <a:off x="986971" y="1600200"/>
+            <a:ext cx="4093029" cy="4724400"/>
+          </a:xfrm>
+        </p:spPr>
+        <p:txBody>
+          <a:bodyPr>
+            <a:normAutofit lnSpcReduction="10000"/>
+          </a:bodyPr>
+          <a:lstStyle/>
+          <a:p>
+            <a:r>
+              <a:rPr lang="en-GB" sz="3700" dirty="0"/>
+              <a:t>Four conditions of mediation: </a:t>
+            </a:r>
+          </a:p>
+          <a:p>
+            <a:pPr marL="457200" lvl="1" indent="0">
+              <a:buNone/>
+            </a:pPr>
+            <a:r>
+              <a:rPr lang="en-GB" sz="3700" dirty="0"/>
+              <a:t>4. The predictor variable must predict the outcome variable less strongly in model 3 than in model 1.</a:t>
+            </a:r>
+          </a:p>
+          <a:p>
+            <a:endParaRPr lang="en-US" sz="3200" dirty="0"/>
+          </a:p>
+        </p:txBody>
+      </p:sp>
+      <p:pic>
+        <p:nvPicPr>
+          <p:cNvPr id="4" name="Picture 3">
+            <a:extLst>
+              <a:ext uri="{FF2B5EF4-FFF2-40B4-BE49-F238E27FC236}">
+                <a16:creationId xmlns:a16="http://schemas.microsoft.com/office/drawing/2014/main" id="{072B4491-614C-8242-A1CF-4F5BF9741262}"/>
+              </a:ext>
+            </a:extLst>
+          </p:cNvPr>
+          <p:cNvPicPr>
+            <a:picLocks noChangeAspect="1"/>
+          </p:cNvPicPr>
+          <p:nvPr/>
+        </p:nvPicPr>
+        <p:blipFill>
+          <a:blip r:embed="rId2">
+            <a:extLst>
+              <a:ext uri="{28A0092B-C50C-407E-A947-70E740481C1C}">
+                <a14:useLocalDpi xmlns:a14="http://schemas.microsoft.com/office/drawing/2010/main" val="0"/>
+              </a:ext>
+            </a:extLst>
+          </a:blip>
+          <a:stretch>
+            <a:fillRect/>
+          </a:stretch>
+        </p:blipFill>
+        <p:spPr>
+          <a:xfrm>
+            <a:off x="5452042" y="1556657"/>
+            <a:ext cx="5616802" cy="4629020"/>
+          </a:xfrm>
+          <a:prstGeom prst="rect">
+            <a:avLst/>
+          </a:prstGeom>
+        </p:spPr>
+      </p:pic>
+      <p:cxnSp>
+        <p:nvCxnSpPr>
+          <p:cNvPr id="5" name="Straight Arrow Connector 4">
+            <a:extLst>
+              <a:ext uri="{FF2B5EF4-FFF2-40B4-BE49-F238E27FC236}">
+                <a16:creationId xmlns:a16="http://schemas.microsoft.com/office/drawing/2014/main" id="{D14AB6C8-78E1-DE44-993C-D1CF954CD649}"/>
+              </a:ext>
+            </a:extLst>
+          </p:cNvPr>
+          <p:cNvCxnSpPr/>
+          <p:nvPr/>
+        </p:nvCxnSpPr>
+        <p:spPr>
+          <a:xfrm>
+            <a:off x="7460343" y="5152571"/>
+            <a:ext cx="1799771" cy="0"/>
+          </a:xfrm>
+          <a:prstGeom prst="straightConnector1">
+            <a:avLst/>
+          </a:prstGeom>
+          <a:ln w="76200">
+            <a:solidFill>
+              <a:srgbClr val="FF0000"/>
+            </a:solidFill>
+            <a:tailEnd type="triangle"/>
+          </a:ln>
+        </p:spPr>
+        <p:style>
+          <a:lnRef idx="1">
+            <a:schemeClr val="accent1"/>
+          </a:lnRef>
+          <a:fillRef idx="0">
+            <a:schemeClr val="accent1"/>
+          </a:fillRef>
+          <a:effectRef idx="0">
+            <a:schemeClr val="accent1"/>
+          </a:effectRef>
+          <a:fontRef idx="minor">
+            <a:schemeClr val="tx1"/>
+          </a:fontRef>
+        </p:style>
+      </p:cxnSp>
+    </p:spTree>
+    <p:extLst>
+      <p:ext uri="{BB962C8B-B14F-4D97-AF65-F5344CB8AC3E}">
+        <p14:creationId xmlns:p14="http://schemas.microsoft.com/office/powerpoint/2010/main" val="1677733616"/>
+      </p:ext>
+    </p:extLst>
+  </p:cSld>
+  <p:clrMapOvr>
+    <a:masterClrMapping/>
+  </p:clrMapOvr>
+</p:sld>
+</file>
+
+<file path=ppt/slides/slide24.xml><?xml version="1.0" encoding="utf-8"?>
+<p:sld xmlns:a="http://schemas.openxmlformats.org/drawingml/2006/main" xmlns:r="http://schemas.openxmlformats.org/officeDocument/2006/relationships" xmlns:p="http://schemas.openxmlformats.org/presentationml/2006/main">
+  <p:cSld>
+    <p:spTree>
+      <p:nvGrpSpPr>
+        <p:cNvPr id="1" name=""/>
+        <p:cNvGrpSpPr/>
+        <p:nvPr/>
+      </p:nvGrpSpPr>
+      <p:grpSpPr>
+        <a:xfrm>
+          <a:off x="0" y="0"/>
+          <a:ext cx="0" cy="0"/>
+          <a:chOff x="0" y="0"/>
+          <a:chExt cx="0" cy="0"/>
+        </a:xfrm>
+      </p:grpSpPr>
+      <p:sp>
+        <p:nvSpPr>
+          <p:cNvPr id="2" name="Title 1"/>
+          <p:cNvSpPr>
+            <a:spLocks noGrp="1"/>
+          </p:cNvSpPr>
+          <p:nvPr>
+            <p:ph type="title"/>
+          </p:nvPr>
+        </p:nvSpPr>
+        <p:spPr/>
+        <p:txBody>
+          <a:bodyPr/>
+          <a:lstStyle/>
+          <a:p>
+            <a:r>
+              <a:rPr lang="en-US" dirty="0"/>
+              <a:t>Limitations of Baron &amp; Kenny’s (1986) approach</a:t>
+            </a:r>
+          </a:p>
+        </p:txBody>
+      </p:sp>
+      <p:sp>
+        <p:nvSpPr>
+          <p:cNvPr id="3" name="Content Placeholder 2"/>
+          <p:cNvSpPr>
+            <a:spLocks noGrp="1"/>
+          </p:cNvSpPr>
+          <p:nvPr>
+            <p:ph idx="1"/>
+          </p:nvPr>
+        </p:nvSpPr>
+        <p:spPr/>
+        <p:txBody>
+          <a:bodyPr/>
+          <a:lstStyle/>
+          <a:p>
+            <a:r>
+              <a:rPr lang="en-GB" sz="3200" dirty="0"/>
+              <a:t>How much of a reduction in the relationship between the predictor and outcome is necessary to infer mediation? </a:t>
+            </a:r>
+          </a:p>
+          <a:p>
+            <a:pPr lvl="1"/>
+            <a:r>
+              <a:rPr lang="en-GB" sz="3200" dirty="0"/>
+              <a:t>people tend to look for a change in significance, which can lead to the ‘all or nothing’ thinking that </a:t>
+            </a:r>
+            <a:r>
+              <a:rPr lang="en-GB" sz="3200" i="1" dirty="0"/>
+              <a:t>p</a:t>
+            </a:r>
+            <a:r>
+              <a:rPr lang="en-GB" sz="3200" dirty="0"/>
+              <a:t>-values encourage (Field) </a:t>
+            </a:r>
+          </a:p>
+          <a:p>
+            <a:pPr marL="457200" lvl="1" indent="0">
+              <a:buNone/>
+            </a:pPr>
+            <a:endParaRPr lang="en-GB" sz="3200" dirty="0"/>
+          </a:p>
+          <a:p>
+            <a:pPr lvl="1"/>
+            <a:r>
+              <a:rPr lang="en-GB" sz="3200" dirty="0"/>
+              <a:t>Never a good idea to run multiple significance tests</a:t>
+            </a:r>
+          </a:p>
+          <a:p>
+            <a:pPr lvl="1"/>
+            <a:r>
+              <a:rPr lang="en-GB" sz="3200" dirty="0"/>
+              <a:t>This approach only tells you if there is a significant mediation, not how large (Hayes)</a:t>
+            </a:r>
+          </a:p>
+          <a:p>
+            <a:pPr lvl="1"/>
+            <a:endParaRPr lang="en-GB" sz="3200" dirty="0"/>
+          </a:p>
+          <a:p>
+            <a:endParaRPr lang="en-US" dirty="0"/>
+          </a:p>
+        </p:txBody>
+      </p:sp>
+    </p:spTree>
+    <p:extLst>
+      <p:ext uri="{BB962C8B-B14F-4D97-AF65-F5344CB8AC3E}">
+        <p14:creationId xmlns:p14="http://schemas.microsoft.com/office/powerpoint/2010/main" val="3012827407"/>
+      </p:ext>
+    </p:extLst>
+  </p:cSld>
+  <p:clrMapOvr>
+    <a:masterClrMapping/>
+  </p:clrMapOvr>
+  <p:timing>
+    <p:tnLst>
+      <p:par>
+        <p:cTn id="1" dur="indefinite" restart="never" nodeType="tmRoot">
+          <p:childTnLst>
+            <p:seq concurrent="1" nextAc="seek">
+              <p:cTn id="2" dur="indefinite" nodeType="mainSeq">
+                <p:childTnLst>
+                  <p:par>
+                    <p:cTn id="3" fill="hold">
+                      <p:stCondLst>
+                        <p:cond delay="indefinite"/>
+                      </p:stCondLst>
+                      <p:childTnLst>
+                        <p:par>
+                          <p:cTn id="4" fill="hold">
+                            <p:stCondLst>
+                              <p:cond delay="0"/>
+                            </p:stCondLst>
+                            <p:childTnLst>
+                              <p:par>
+                                <p:cTn id="5" presetID="1" presetClass="entr" presetSubtype="0" fill="hold" grpId="0" nodeType="clickEffect">
+                                  <p:stCondLst>
+                                    <p:cond delay="0"/>
+                                  </p:stCondLst>
+                                  <p:childTnLst>
+                                    <p:set>
+                                      <p:cBhvr>
+                                        <p:cTn id="6" dur="1" fill="hold">
+                                          <p:stCondLst>
+                                            <p:cond delay="0"/>
+                                          </p:stCondLst>
+                                        </p:cTn>
+                                        <p:tgtEl>
+                                          <p:spTgt spid="3">
+                                            <p:txEl>
+                                              <p:pRg st="0" end="0"/>
+                                            </p:txEl>
+                                          </p:spTgt>
+                                        </p:tgtEl>
+                                        <p:attrNameLst>
+                                          <p:attrName>style.visibility</p:attrName>
+                                        </p:attrNameLst>
+                                      </p:cBhvr>
+                                      <p:to>
+                                        <p:strVal val="visible"/>
+                                      </p:to>
+                                    </p:set>
+                                  </p:childTnLst>
+                                </p:cTn>
+                              </p:par>
+                              <p:par>
+                                <p:cTn id="7" presetID="1" presetClass="entr" presetSubtype="0" fill="hold" grpId="0" nodeType="withEffect">
+                                  <p:stCondLst>
+                                    <p:cond delay="0"/>
+                                  </p:stCondLst>
+                                  <p:childTnLst>
+                                    <p:set>
+                                      <p:cBhvr>
+                                        <p:cTn id="8" dur="1" fill="hold">
+                                          <p:stCondLst>
+                                            <p:cond delay="0"/>
+                                          </p:stCondLst>
+                                        </p:cTn>
+                                        <p:tgtEl>
+                                          <p:spTgt spid="3">
+                                            <p:txEl>
+                                              <p:pRg st="1" end="1"/>
+                                            </p:txEl>
+                                          </p:spTgt>
+                                        </p:tgtEl>
+                                        <p:attrNameLst>
+                                          <p:attrName>style.visibility</p:attrName>
+                                        </p:attrNameLst>
+                                      </p:cBhvr>
+                                      <p:to>
+                                        <p:strVal val="visible"/>
+                                      </p:to>
+                                    </p:set>
+                                  </p:childTnLst>
+                                </p:cTn>
+                              </p:par>
+                            </p:childTnLst>
+                          </p:cTn>
+                        </p:par>
+                      </p:childTnLst>
+                    </p:cTn>
+                  </p:par>
+                  <p:par>
+                    <p:cTn id="9" fill="hold">
+                      <p:stCondLst>
+                        <p:cond delay="indefinite"/>
+                      </p:stCondLst>
+                      <p:childTnLst>
+                        <p:par>
+                          <p:cTn id="10" fill="hold">
+                            <p:stCondLst>
+                              <p:cond delay="0"/>
+                            </p:stCondLst>
+                            <p:childTnLst>
+                              <p:par>
+                                <p:cTn id="11" presetID="1" presetClass="entr" presetSubtype="0" fill="hold" grpId="0" nodeType="clickEffect">
+                                  <p:stCondLst>
+                                    <p:cond delay="0"/>
+                                  </p:stCondLst>
+                                  <p:childTnLst>
+                                    <p:set>
+                                      <p:cBhvr>
+                                        <p:cTn id="12" dur="1" fill="hold">
+                                          <p:stCondLst>
+                                            <p:cond delay="0"/>
+                                          </p:stCondLst>
+                                        </p:cTn>
+                                        <p:tgtEl>
+                                          <p:spTgt spid="3">
+                                            <p:txEl>
+                                              <p:pRg st="3" end="3"/>
+                                            </p:txEl>
+                                          </p:spTgt>
+                                        </p:tgtEl>
+                                        <p:attrNameLst>
+                                          <p:attrName>style.visibility</p:attrName>
+                                        </p:attrNameLst>
+                                      </p:cBhvr>
+                                      <p:to>
+                                        <p:strVal val="visible"/>
+                                      </p:to>
+                                    </p:set>
+                                  </p:childTnLst>
+                                </p:cTn>
+                              </p:par>
+                              <p:par>
+                                <p:cTn id="13" presetID="1" presetClass="entr" presetSubtype="0" fill="hold" grpId="0" nodeType="withEffect">
+                                  <p:stCondLst>
+                                    <p:cond delay="0"/>
+                                  </p:stCondLst>
+                                  <p:childTnLst>
+                                    <p:set>
+                                      <p:cBhvr>
+                                        <p:cTn id="14" dur="1" fill="hold">
+                                          <p:stCondLst>
+                                            <p:cond delay="0"/>
+                                          </p:stCondLst>
+                                        </p:cTn>
+                                        <p:tgtEl>
+                                          <p:spTgt spid="3">
+                                            <p:txEl>
+                                              <p:pRg st="4" end="4"/>
+                                            </p:txEl>
+                                          </p:spTgt>
+                                        </p:tgtEl>
+                                        <p:attrNameLst>
+                                          <p:attrName>style.visibility</p:attrName>
+                                        </p:attrNameLst>
+                                      </p:cBhvr>
+                                      <p:to>
+                                        <p:strVal val="visible"/>
+                                      </p:to>
+                                    </p:set>
+                                  </p:childTnLst>
+                                </p:cTn>
+                              </p:par>
+                            </p:childTnLst>
+                          </p:cTn>
+                        </p:par>
+                      </p:childTnLst>
+                    </p:cTn>
+                  </p:par>
+                </p:childTnLst>
+              </p:cTn>
+              <p:prevCondLst>
+                <p:cond evt="onPrev" delay="0">
+                  <p:tgtEl>
+                    <p:sldTgt/>
+                  </p:tgtEl>
+                </p:cond>
+              </p:prevCondLst>
+              <p:nextCondLst>
+                <p:cond evt="onNext" delay="0">
+                  <p:tgtEl>
+                    <p:sldTgt/>
+                  </p:tgtEl>
+                </p:cond>
+              </p:nextCondLst>
+            </p:seq>
+          </p:childTnLst>
+        </p:cTn>
+      </p:par>
+    </p:tnLst>
+    <p:bldLst>
+      <p:bldP spid="3" grpId="0" uiExpand="1" build="p"/>
+    </p:bldLst>
+  </p:timing>
+</p:sld>
+</file>
+
+<file path=ppt/slides/slide25.xml><?xml version="1.0" encoding="utf-8"?>
+<p:sld xmlns:a="http://schemas.openxmlformats.org/drawingml/2006/main" xmlns:r="http://schemas.openxmlformats.org/officeDocument/2006/relationships" xmlns:p="http://schemas.openxmlformats.org/presentationml/2006/main">
+  <p:cSld>
+    <p:spTree>
+      <p:nvGrpSpPr>
+        <p:cNvPr id="1" name=""/>
+        <p:cNvGrpSpPr/>
+        <p:nvPr/>
+      </p:nvGrpSpPr>
+      <p:grpSpPr>
+        <a:xfrm>
+          <a:off x="0" y="0"/>
+          <a:ext cx="0" cy="0"/>
+          <a:chOff x="0" y="0"/>
+          <a:chExt cx="0" cy="0"/>
+        </a:xfrm>
+      </p:grpSpPr>
+      <p:sp>
+        <p:nvSpPr>
+          <p:cNvPr id="2" name="Title 1"/>
+          <p:cNvSpPr>
+            <a:spLocks noGrp="1"/>
+          </p:cNvSpPr>
+          <p:nvPr>
+            <p:ph type="title"/>
+          </p:nvPr>
+        </p:nvSpPr>
+        <p:spPr/>
+        <p:txBody>
+          <a:bodyPr/>
+          <a:lstStyle/>
+          <a:p>
+            <a:r>
+              <a:rPr lang="en-US" dirty="0" err="1"/>
+              <a:t>Sobel</a:t>
+            </a:r>
+            <a:r>
+              <a:rPr lang="en-US" dirty="0"/>
+              <a:t> Test (</a:t>
+            </a:r>
+            <a:r>
+              <a:rPr lang="en-US" dirty="0" err="1"/>
+              <a:t>Sobel</a:t>
+            </a:r>
+            <a:r>
+              <a:rPr lang="en-US" dirty="0"/>
+              <a:t>, 1982)</a:t>
+            </a:r>
+          </a:p>
+        </p:txBody>
+      </p:sp>
+      <p:sp>
+        <p:nvSpPr>
+          <p:cNvPr id="3" name="Content Placeholder 2"/>
+          <p:cNvSpPr>
+            <a:spLocks noGrp="1"/>
+          </p:cNvSpPr>
+          <p:nvPr>
+            <p:ph idx="1"/>
+          </p:nvPr>
+        </p:nvSpPr>
+        <p:spPr/>
+        <p:txBody>
+          <a:bodyPr>
+            <a:normAutofit/>
+          </a:bodyPr>
+          <a:lstStyle/>
+          <a:p>
+            <a:r>
+              <a:rPr lang="en-GB" sz="3200" dirty="0"/>
+              <a:t>An alternative is to estimate the indirect effect and its significance using the </a:t>
+            </a:r>
+            <a:r>
+              <a:rPr lang="en-GB" sz="3200" b="1" dirty="0"/>
+              <a:t>Sobel test </a:t>
+            </a:r>
+            <a:r>
+              <a:rPr lang="en-GB" sz="3200" dirty="0"/>
+              <a:t>(Sobel, 1982). </a:t>
+            </a:r>
+          </a:p>
+          <a:p>
+            <a:endParaRPr lang="en-GB" sz="3200" dirty="0"/>
+          </a:p>
+          <a:p>
+            <a:r>
+              <a:rPr lang="en-GB" sz="3200" dirty="0"/>
+              <a:t>If the Sobel test is significant, there is significant mediation.</a:t>
+            </a:r>
+          </a:p>
+          <a:p>
+            <a:endParaRPr lang="en-GB" sz="3200" dirty="0"/>
+          </a:p>
+          <a:p>
+            <a:r>
+              <a:rPr lang="en-GB" sz="3200" dirty="0"/>
+              <a:t>Significance tests depend upon sample size.</a:t>
+            </a:r>
+            <a:endParaRPr lang="en-US" sz="3200" dirty="0"/>
+          </a:p>
+        </p:txBody>
+      </p:sp>
+    </p:spTree>
+    <p:extLst>
+      <p:ext uri="{BB962C8B-B14F-4D97-AF65-F5344CB8AC3E}">
+        <p14:creationId xmlns:p14="http://schemas.microsoft.com/office/powerpoint/2010/main" val="3218762647"/>
+      </p:ext>
+    </p:extLst>
+  </p:cSld>
+  <p:clrMapOvr>
+    <a:masterClrMapping/>
+  </p:clrMapOvr>
+  <p:timing>
+    <p:tnLst>
+      <p:par>
+        <p:cTn id="1" dur="indefinite" restart="never" nodeType="tmRoot">
+          <p:childTnLst>
+            <p:seq concurrent="1" nextAc="seek">
+              <p:cTn id="2" dur="indefinite" nodeType="mainSeq">
+                <p:childTnLst>
+                  <p:par>
+                    <p:cTn id="3" fill="hold">
+                      <p:stCondLst>
+                        <p:cond delay="indefinite"/>
+                      </p:stCondLst>
+                      <p:childTnLst>
+                        <p:par>
+                          <p:cTn id="4" fill="hold">
+                            <p:stCondLst>
+                              <p:cond delay="0"/>
+                            </p:stCondLst>
+                            <p:childTnLst>
+                              <p:par>
+                                <p:cTn id="5" presetID="1" presetClass="entr" presetSubtype="0" fill="hold" grpId="0" nodeType="clickEffect">
+                                  <p:stCondLst>
+                                    <p:cond delay="0"/>
+                                  </p:stCondLst>
+                                  <p:childTnLst>
+                                    <p:set>
+                                      <p:cBhvr>
+                                        <p:cTn id="6" dur="1" fill="hold">
+                                          <p:stCondLst>
+                                            <p:cond delay="0"/>
+                                          </p:stCondLst>
+                                        </p:cTn>
+                                        <p:tgtEl>
+                                          <p:spTgt spid="3">
+                                            <p:txEl>
+                                              <p:pRg st="0" end="0"/>
+                                            </p:txEl>
+                                          </p:spTgt>
+                                        </p:tgtEl>
+                                        <p:attrNameLst>
+                                          <p:attrName>style.visibility</p:attrName>
+                                        </p:attrNameLst>
+                                      </p:cBhvr>
+                                      <p:to>
+                                        <p:strVal val="visible"/>
+                                      </p:to>
+                                    </p:set>
+                                  </p:childTnLst>
+                                </p:cTn>
+                              </p:par>
+                            </p:childTnLst>
+                          </p:cTn>
+                        </p:par>
+                      </p:childTnLst>
+                    </p:cTn>
+                  </p:par>
+                  <p:par>
+                    <p:cTn id="7" fill="hold">
+                      <p:stCondLst>
+                        <p:cond delay="indefinite"/>
+                      </p:stCondLst>
+                      <p:childTnLst>
+                        <p:par>
+                          <p:cTn id="8" fill="hold">
+                            <p:stCondLst>
+                              <p:cond delay="0"/>
+                            </p:stCondLst>
+                            <p:childTnLst>
+                              <p:par>
+                                <p:cTn id="9" presetID="1" presetClass="entr" presetSubtype="0" fill="hold" grpId="0" nodeType="clickEffect">
+                                  <p:stCondLst>
+                                    <p:cond delay="0"/>
+                                  </p:stCondLst>
+                                  <p:childTnLst>
+                                    <p:set>
+                                      <p:cBhvr>
+                                        <p:cTn id="10" dur="1" fill="hold">
+                                          <p:stCondLst>
+                                            <p:cond delay="0"/>
+                                          </p:stCondLst>
+                                        </p:cTn>
+                                        <p:tgtEl>
+                                          <p:spTgt spid="3">
+                                            <p:txEl>
+                                              <p:pRg st="2" end="2"/>
+                                            </p:txEl>
+                                          </p:spTgt>
+                                        </p:tgtEl>
+                                        <p:attrNameLst>
+                                          <p:attrName>style.visibility</p:attrName>
+                                        </p:attrNameLst>
+                                      </p:cBhvr>
+                                      <p:to>
+                                        <p:strVal val="visible"/>
+                                      </p:to>
+                                    </p:set>
+                                  </p:childTnLst>
+                                </p:cTn>
+                              </p:par>
+                            </p:childTnLst>
+                          </p:cTn>
+                        </p:par>
+                      </p:childTnLst>
+                    </p:cTn>
+                  </p:par>
+                  <p:par>
+                    <p:cTn id="11" fill="hold">
+                      <p:stCondLst>
+                        <p:cond delay="indefinite"/>
+                      </p:stCondLst>
+                      <p:childTnLst>
+                        <p:par>
+                          <p:cTn id="12" fill="hold">
+                            <p:stCondLst>
+                              <p:cond delay="0"/>
+                            </p:stCondLst>
+                            <p:childTnLst>
+                              <p:par>
+                                <p:cTn id="13" presetID="1" presetClass="entr" presetSubtype="0" fill="hold" grpId="0" nodeType="clickEffect">
+                                  <p:stCondLst>
+                                    <p:cond delay="0"/>
+                                  </p:stCondLst>
+                                  <p:childTnLst>
+                                    <p:set>
+                                      <p:cBhvr>
+                                        <p:cTn id="14" dur="1" fill="hold">
+                                          <p:stCondLst>
+                                            <p:cond delay="0"/>
+                                          </p:stCondLst>
+                                        </p:cTn>
+                                        <p:tgtEl>
+                                          <p:spTgt spid="3">
+                                            <p:txEl>
+                                              <p:pRg st="4" end="4"/>
+                                            </p:txEl>
+                                          </p:spTgt>
+                                        </p:tgtEl>
+                                        <p:attrNameLst>
+                                          <p:attrName>style.visibility</p:attrName>
+                                        </p:attrNameLst>
+                                      </p:cBhvr>
+                                      <p:to>
+                                        <p:strVal val="visible"/>
+                                      </p:to>
+                                    </p:set>
+                                  </p:childTnLst>
+                                </p:cTn>
+                              </p:par>
+                            </p:childTnLst>
+                          </p:cTn>
+                        </p:par>
+                      </p:childTnLst>
+                    </p:cTn>
+                  </p:par>
+                </p:childTnLst>
+              </p:cTn>
+              <p:prevCondLst>
+                <p:cond evt="onPrev" delay="0">
+                  <p:tgtEl>
+                    <p:sldTgt/>
+                  </p:tgtEl>
+                </p:cond>
+              </p:prevCondLst>
+              <p:nextCondLst>
+                <p:cond evt="onNext" delay="0">
+                  <p:tgtEl>
+                    <p:sldTgt/>
+                  </p:tgtEl>
+                </p:cond>
+              </p:nextCondLst>
+            </p:seq>
+          </p:childTnLst>
+        </p:cTn>
+      </p:par>
+    </p:tnLst>
+    <p:bldLst>
+      <p:bldP spid="3" grpId="0" build="p"/>
+    </p:bldLst>
+  </p:timing>
+</p:sld>
+</file>
+
+<file path=ppt/slides/slide26.xml><?xml version="1.0" encoding="utf-8"?>
+<p:sld xmlns:a="http://schemas.openxmlformats.org/drawingml/2006/main" xmlns:r="http://schemas.openxmlformats.org/officeDocument/2006/relationships" xmlns:p="http://schemas.openxmlformats.org/presentationml/2006/main">
+  <p:cSld>
+    <p:spTree>
+      <p:nvGrpSpPr>
+        <p:cNvPr id="1" name=""/>
+        <p:cNvGrpSpPr/>
+        <p:nvPr/>
+      </p:nvGrpSpPr>
+      <p:grpSpPr>
+        <a:xfrm>
+          <a:off x="0" y="0"/>
+          <a:ext cx="0" cy="0"/>
+          <a:chOff x="0" y="0"/>
+          <a:chExt cx="0" cy="0"/>
+        </a:xfrm>
+      </p:grpSpPr>
+      <p:sp>
+        <p:nvSpPr>
+          <p:cNvPr id="2" name="Title 1">
+            <a:extLst>
+              <a:ext uri="{FF2B5EF4-FFF2-40B4-BE49-F238E27FC236}">
+                <a16:creationId xmlns:a16="http://schemas.microsoft.com/office/drawing/2014/main" id="{4D7DF899-CFB8-A944-8F22-38CFE5674FEC}"/>
+              </a:ext>
+            </a:extLst>
+          </p:cNvPr>
+          <p:cNvSpPr>
+            <a:spLocks noGrp="1"/>
+          </p:cNvSpPr>
+          <p:nvPr>
+            <p:ph type="title"/>
+          </p:nvPr>
+        </p:nvSpPr>
+        <p:spPr/>
+        <p:txBody>
+          <a:bodyPr/>
+          <a:lstStyle/>
+          <a:p>
+            <a:r>
+              <a:rPr lang="en-US" dirty="0"/>
+              <a:t>PROCESS</a:t>
+            </a:r>
+          </a:p>
+        </p:txBody>
+      </p:sp>
+      <p:sp>
+        <p:nvSpPr>
+          <p:cNvPr id="3" name="Content Placeholder 2">
+            <a:extLst>
+              <a:ext uri="{FF2B5EF4-FFF2-40B4-BE49-F238E27FC236}">
+                <a16:creationId xmlns:a16="http://schemas.microsoft.com/office/drawing/2014/main" id="{2EC8518A-D12D-A247-8EE5-95CF00644036}"/>
+              </a:ext>
+            </a:extLst>
+          </p:cNvPr>
+          <p:cNvSpPr>
+            <a:spLocks noGrp="1"/>
+          </p:cNvSpPr>
+          <p:nvPr>
+            <p:ph idx="1"/>
+          </p:nvPr>
+        </p:nvSpPr>
+        <p:spPr/>
+        <p:txBody>
+          <a:bodyPr>
+            <a:normAutofit/>
+          </a:bodyPr>
+          <a:lstStyle/>
+          <a:p>
+            <a:r>
+              <a:rPr lang="en-US" sz="3200" dirty="0"/>
+              <a:t>Will give you strength of both your direct (predictor) and indirect (mediator effects)</a:t>
+            </a:r>
+          </a:p>
+          <a:p>
+            <a:endParaRPr lang="en-US" sz="3200" dirty="0"/>
+          </a:p>
+          <a:p>
+            <a:r>
+              <a:rPr lang="en-US" sz="3200" dirty="0"/>
+              <a:t>That’s what you did …</a:t>
+            </a:r>
+          </a:p>
+        </p:txBody>
+      </p:sp>
+    </p:spTree>
+    <p:extLst>
+      <p:ext uri="{BB962C8B-B14F-4D97-AF65-F5344CB8AC3E}">
+        <p14:creationId xmlns:p14="http://schemas.microsoft.com/office/powerpoint/2010/main" val="981304447"/>
+      </p:ext>
+    </p:extLst>
+  </p:cSld>
+  <p:clrMapOvr>
+    <a:masterClrMapping/>
+  </p:clrMapOvr>
+  <p:timing>
+    <p:tnLst>
+      <p:par>
+        <p:cTn id="1" dur="indefinite" restart="never" nodeType="tmRoot">
+          <p:childTnLst>
+            <p:seq concurrent="1" nextAc="seek">
+              <p:cTn id="2" dur="indefinite" nodeType="mainSeq">
+                <p:childTnLst>
+                  <p:par>
+                    <p:cTn id="3" fill="hold">
+                      <p:stCondLst>
+                        <p:cond delay="indefinite"/>
+                      </p:stCondLst>
+                      <p:childTnLst>
+                        <p:par>
+                          <p:cTn id="4" fill="hold">
+                            <p:stCondLst>
+                              <p:cond delay="0"/>
+                            </p:stCondLst>
+                            <p:childTnLst>
+                              <p:par>
+                                <p:cTn id="5" presetID="1" presetClass="entr" presetSubtype="0" fill="hold" grpId="0" nodeType="clickEffect">
+                                  <p:stCondLst>
+                                    <p:cond delay="0"/>
+                                  </p:stCondLst>
+                                  <p:childTnLst>
+                                    <p:set>
+                                      <p:cBhvr>
+                                        <p:cTn id="6" dur="1" fill="hold">
+                                          <p:stCondLst>
+                                            <p:cond delay="0"/>
+                                          </p:stCondLst>
+                                        </p:cTn>
+                                        <p:tgtEl>
+                                          <p:spTgt spid="3">
+                                            <p:txEl>
+                                              <p:pRg st="0" end="0"/>
+                                            </p:txEl>
+                                          </p:spTgt>
+                                        </p:tgtEl>
+                                        <p:attrNameLst>
+                                          <p:attrName>style.visibility</p:attrName>
+                                        </p:attrNameLst>
+                                      </p:cBhvr>
+                                      <p:to>
+                                        <p:strVal val="visible"/>
+                                      </p:to>
+                                    </p:set>
+                                  </p:childTnLst>
+                                </p:cTn>
+                              </p:par>
+                            </p:childTnLst>
+                          </p:cTn>
+                        </p:par>
+                      </p:childTnLst>
+                    </p:cTn>
+                  </p:par>
+                  <p:par>
+                    <p:cTn id="7" fill="hold">
+                      <p:stCondLst>
+                        <p:cond delay="indefinite"/>
+                      </p:stCondLst>
+                      <p:childTnLst>
+                        <p:par>
+                          <p:cTn id="8" fill="hold">
+                            <p:stCondLst>
+                              <p:cond delay="0"/>
+                            </p:stCondLst>
+                            <p:childTnLst>
+                              <p:par>
+                                <p:cTn id="9" presetID="1" presetClass="entr" presetSubtype="0" fill="hold" grpId="0" nodeType="clickEffect">
+                                  <p:stCondLst>
+                                    <p:cond delay="0"/>
+                                  </p:stCondLst>
+                                  <p:childTnLst>
+                                    <p:set>
+                                      <p:cBhvr>
+                                        <p:cTn id="10" dur="1" fill="hold">
+                                          <p:stCondLst>
+                                            <p:cond delay="0"/>
+                                          </p:stCondLst>
+                                        </p:cTn>
+                                        <p:tgtEl>
+                                          <p:spTgt spid="3">
+                                            <p:txEl>
+                                              <p:pRg st="2" end="2"/>
+                                            </p:txEl>
+                                          </p:spTgt>
+                                        </p:tgtEl>
+                                        <p:attrNameLst>
+                                          <p:attrName>style.visibility</p:attrName>
+                                        </p:attrNameLst>
+                                      </p:cBhvr>
+                                      <p:to>
+                                        <p:strVal val="visible"/>
+                                      </p:to>
+                                    </p:set>
+                                  </p:childTnLst>
+                                </p:cTn>
+                              </p:par>
+                            </p:childTnLst>
+                          </p:cTn>
+                        </p:par>
+                      </p:childTnLst>
+                    </p:cTn>
+                  </p:par>
+                </p:childTnLst>
+              </p:cTn>
+              <p:prevCondLst>
+                <p:cond evt="onPrev" delay="0">
+                  <p:tgtEl>
+                    <p:sldTgt/>
+                  </p:tgtEl>
+                </p:cond>
+              </p:prevCondLst>
+              <p:nextCondLst>
+                <p:cond evt="onNext" delay="0">
+                  <p:tgtEl>
+                    <p:sldTgt/>
+                  </p:tgtEl>
+                </p:cond>
+              </p:nextCondLst>
+            </p:seq>
+          </p:childTnLst>
+        </p:cTn>
+      </p:par>
+    </p:tnLst>
+    <p:bldLst>
+      <p:bldP spid="3" grpId="0" build="p"/>
+    </p:bldLst>
+  </p:timing>
+</p:sld>
+</file>
+
+<file path=ppt/slides/slide27.xml><?xml version="1.0" encoding="utf-8"?>
+<p:sld xmlns:a="http://schemas.openxmlformats.org/drawingml/2006/main" xmlns:r="http://schemas.openxmlformats.org/officeDocument/2006/relationships" xmlns:p="http://schemas.openxmlformats.org/presentationml/2006/main">
+  <p:cSld>
+    <p:spTree>
+      <p:nvGrpSpPr>
+        <p:cNvPr id="1" name=""/>
+        <p:cNvGrpSpPr/>
+        <p:nvPr/>
+      </p:nvGrpSpPr>
+      <p:grpSpPr>
+        <a:xfrm>
+          <a:off x="0" y="0"/>
+          <a:ext cx="0" cy="0"/>
+          <a:chOff x="0" y="0"/>
+          <a:chExt cx="0" cy="0"/>
+        </a:xfrm>
+      </p:grpSpPr>
+      <p:sp>
+        <p:nvSpPr>
+          <p:cNvPr id="3" name="Content Placeholder 2">
+            <a:extLst>
+              <a:ext uri="{FF2B5EF4-FFF2-40B4-BE49-F238E27FC236}">
+                <a16:creationId xmlns:a16="http://schemas.microsoft.com/office/drawing/2014/main" id="{C6F73CED-251B-3665-111F-2BC3388D6B4F}"/>
+              </a:ext>
+            </a:extLst>
+          </p:cNvPr>
+          <p:cNvSpPr>
+            <a:spLocks noGrp="1"/>
+          </p:cNvSpPr>
+          <p:nvPr>
+            <p:ph idx="1"/>
+          </p:nvPr>
+        </p:nvSpPr>
+        <p:spPr>
+          <a:xfrm>
+            <a:off x="0" y="483326"/>
+            <a:ext cx="12096206" cy="6087291"/>
+          </a:xfrm>
+        </p:spPr>
+        <p:txBody>
+          <a:bodyPr>
+            <a:normAutofit fontScale="77500" lnSpcReduction="20000"/>
+          </a:bodyPr>
+          <a:lstStyle/>
+          <a:p>
+            <a:r>
+              <a:rPr lang="en-US" sz="3400" dirty="0"/>
+              <a:t>From Fairchild &amp; McDaniel (2017): </a:t>
+            </a:r>
+            <a:r>
+              <a:rPr lang="en-US" sz="3400" b="0" i="0" dirty="0">
+                <a:solidFill>
+                  <a:srgbClr val="2A2A2A"/>
+                </a:solidFill>
+                <a:effectLst/>
+              </a:rPr>
+              <a:t>Best (but oft-forgotten) practices: mediation analysis. </a:t>
+            </a:r>
+            <a:r>
+              <a:rPr lang="en-US" sz="3400" b="0" i="1" dirty="0">
+                <a:solidFill>
+                  <a:srgbClr val="2A2A2A"/>
+                </a:solidFill>
+                <a:effectLst/>
+              </a:rPr>
+              <a:t>The American Journal of Clinical </a:t>
+            </a:r>
+            <a:r>
+              <a:rPr lang="en-US" sz="3400" b="0" i="1" dirty="0" err="1">
+                <a:solidFill>
+                  <a:srgbClr val="2A2A2A"/>
+                </a:solidFill>
+                <a:effectLst/>
+              </a:rPr>
+              <a:t>Nutrition</a:t>
+            </a:r>
+            <a:r>
+              <a:rPr lang="en-US" sz="3400" b="0" i="0" dirty="0" err="1">
+                <a:solidFill>
+                  <a:srgbClr val="2A2A2A"/>
+                </a:solidFill>
+                <a:effectLst/>
+              </a:rPr>
+              <a:t>,</a:t>
+            </a:r>
+            <a:r>
+              <a:rPr lang="en-US" sz="3400" b="0" i="0" u="none" strike="noStrike" dirty="0" err="1">
+                <a:solidFill>
+                  <a:srgbClr val="006FB7"/>
+                </a:solidFill>
+                <a:effectLst/>
+                <a:hlinkClick r:id="rId3"/>
+              </a:rPr>
+              <a:t>https</a:t>
+            </a:r>
+            <a:r>
+              <a:rPr lang="en-US" sz="3400" b="0" i="0" u="none" strike="noStrike" dirty="0">
+                <a:solidFill>
+                  <a:srgbClr val="006FB7"/>
+                </a:solidFill>
+                <a:effectLst/>
+                <a:hlinkClick r:id="rId3"/>
+              </a:rPr>
+              <a:t>://doi.org/10.3945/ajcn.117.152546</a:t>
+            </a:r>
+            <a:r>
+              <a:rPr lang="en-US" sz="3400" dirty="0"/>
+              <a:t> “</a:t>
+            </a:r>
+            <a:r>
+              <a:rPr lang="en-US" sz="3400" b="0" i="0" dirty="0">
+                <a:solidFill>
+                  <a:srgbClr val="2A2A2A"/>
+                </a:solidFill>
+                <a:effectLst/>
+              </a:rPr>
+              <a:t>cross-sectional sample data can indicate support for mediation effects when there is no true mediation process in the population (</a:t>
+            </a:r>
+            <a:r>
+              <a:rPr lang="en-US" sz="3400" b="0" i="0" u="none" strike="noStrike" dirty="0">
+                <a:solidFill>
+                  <a:srgbClr val="006FB7"/>
+                </a:solidFill>
+                <a:effectLst/>
+              </a:rPr>
+              <a:t>92</a:t>
+            </a:r>
+            <a:r>
+              <a:rPr lang="en-US" sz="3400" b="0" i="0" dirty="0">
+                <a:solidFill>
+                  <a:srgbClr val="2A2A2A"/>
+                </a:solidFill>
+                <a:effectLst/>
+              </a:rPr>
+              <a:t>). These findings are not to say that it is impossible to examine mediation hypotheses with data that are collected at one point in time; however, there is an onus on the researcher to provide a compelling rationale that temporal ordering of the examined variables is correct (</a:t>
+            </a:r>
+            <a:r>
+              <a:rPr lang="en-US" sz="3400" b="0" i="0" u="none" strike="noStrike" dirty="0">
+                <a:solidFill>
+                  <a:srgbClr val="006FB7"/>
+                </a:solidFill>
+                <a:effectLst/>
+              </a:rPr>
+              <a:t>93</a:t>
+            </a:r>
+            <a:r>
+              <a:rPr lang="en-US" sz="3400" b="0" i="0" dirty="0">
+                <a:solidFill>
+                  <a:srgbClr val="2A2A2A"/>
+                </a:solidFill>
+                <a:effectLst/>
+              </a:rPr>
+              <a:t>, </a:t>
+            </a:r>
+            <a:r>
+              <a:rPr lang="en-US" sz="3400" b="0" i="0" u="none" strike="noStrike" dirty="0">
+                <a:solidFill>
+                  <a:srgbClr val="006FB7"/>
+                </a:solidFill>
+                <a:effectLst/>
+              </a:rPr>
+              <a:t>94</a:t>
+            </a:r>
+            <a:r>
+              <a:rPr lang="en-US" sz="3400" b="0" i="0" dirty="0">
+                <a:solidFill>
+                  <a:srgbClr val="2A2A2A"/>
+                </a:solidFill>
+                <a:effectLst/>
+              </a:rPr>
+              <a:t>). Indeed, Kenny and colleagues (</a:t>
+            </a:r>
+            <a:r>
+              <a:rPr lang="en-US" sz="3400" b="0" i="0" u="none" strike="noStrike" dirty="0">
+                <a:solidFill>
+                  <a:srgbClr val="006FB7"/>
+                </a:solidFill>
+                <a:effectLst/>
+              </a:rPr>
+              <a:t>10</a:t>
+            </a:r>
+            <a:r>
+              <a:rPr lang="en-US" sz="3400" b="0" i="0" dirty="0">
+                <a:solidFill>
+                  <a:srgbClr val="2A2A2A"/>
+                </a:solidFill>
+                <a:effectLst/>
+              </a:rPr>
+              <a:t>, </a:t>
+            </a:r>
+            <a:r>
+              <a:rPr lang="en-US" sz="3400" b="0" i="0" u="none" strike="noStrike" dirty="0">
+                <a:solidFill>
+                  <a:srgbClr val="006FB7"/>
+                </a:solidFill>
+                <a:effectLst/>
+              </a:rPr>
+              <a:t>11</a:t>
+            </a:r>
+            <a:r>
+              <a:rPr lang="en-US" sz="3400" b="0" i="0" dirty="0">
+                <a:solidFill>
+                  <a:srgbClr val="2A2A2A"/>
+                </a:solidFill>
+                <a:effectLst/>
+              </a:rPr>
+              <a:t>) emphasized in early work that mediation analysis should not be conducted unless the temporal ordering of the variables is clear. Examining mediation hypotheses with cross-sectional data may be reasonable, for example, if measured variables can reflect nearly instantaneous processes, such as may be the case with some pharmacokinetics work, or imply timing by nature of their construction (</a:t>
+            </a:r>
+            <a:r>
+              <a:rPr lang="en-US" sz="3400" b="0" i="0" u="none" strike="noStrike" dirty="0">
+                <a:solidFill>
+                  <a:srgbClr val="006FB7"/>
+                </a:solidFill>
+                <a:effectLst/>
+              </a:rPr>
+              <a:t>18</a:t>
+            </a:r>
+            <a:r>
+              <a:rPr lang="en-US" sz="3400" b="0" i="0" dirty="0">
+                <a:solidFill>
+                  <a:srgbClr val="2A2A2A"/>
+                </a:solidFill>
+                <a:effectLst/>
+              </a:rPr>
+              <a:t>, </a:t>
+            </a:r>
+            <a:r>
+              <a:rPr lang="en-US" sz="3400" b="0" i="0" u="none" strike="noStrike" dirty="0">
+                <a:solidFill>
+                  <a:srgbClr val="006FB7"/>
+                </a:solidFill>
+                <a:effectLst/>
+              </a:rPr>
+              <a:t>93</a:t>
+            </a:r>
+            <a:r>
+              <a:rPr lang="en-US" sz="3400" b="0" i="0" dirty="0">
+                <a:solidFill>
+                  <a:srgbClr val="2A2A2A"/>
+                </a:solidFill>
+                <a:effectLst/>
+              </a:rPr>
+              <a:t>). Consider a research scenario in which the mediating role of parental food monitoring during an individual’s adolescence (</a:t>
+            </a:r>
+            <a:r>
+              <a:rPr lang="en-US" sz="3400" b="0" i="1" dirty="0">
+                <a:solidFill>
+                  <a:srgbClr val="2A2A2A"/>
+                </a:solidFill>
+                <a:effectLst/>
+              </a:rPr>
+              <a:t>M</a:t>
+            </a:r>
+            <a:r>
+              <a:rPr lang="en-US" sz="3400" b="0" i="0" dirty="0">
+                <a:solidFill>
+                  <a:srgbClr val="2A2A2A"/>
+                </a:solidFill>
+                <a:effectLst/>
+              </a:rPr>
+              <a:t>) is posited to explain the impact of parental childhood obesity (</a:t>
+            </a:r>
+            <a:r>
+              <a:rPr lang="en-US" sz="3400" b="0" i="1" dirty="0">
+                <a:solidFill>
+                  <a:srgbClr val="2A2A2A"/>
+                </a:solidFill>
+                <a:effectLst/>
+              </a:rPr>
+              <a:t>X</a:t>
+            </a:r>
+            <a:r>
+              <a:rPr lang="en-US" sz="3400" b="0" i="0" dirty="0">
+                <a:solidFill>
+                  <a:srgbClr val="2A2A2A"/>
+                </a:solidFill>
+                <a:effectLst/>
+              </a:rPr>
+              <a:t>) on subjects’ current obesity status (</a:t>
+            </a:r>
+            <a:r>
+              <a:rPr lang="en-US" sz="3400" b="0" i="1" dirty="0">
+                <a:solidFill>
+                  <a:srgbClr val="2A2A2A"/>
+                </a:solidFill>
+                <a:effectLst/>
+              </a:rPr>
+              <a:t>Y</a:t>
+            </a:r>
+            <a:r>
+              <a:rPr lang="en-US" sz="3400" b="0" i="0" dirty="0">
+                <a:solidFill>
+                  <a:srgbClr val="2A2A2A"/>
+                </a:solidFill>
+                <a:effectLst/>
+              </a:rPr>
+              <a:t>). Although one may garner this information from participants at a single measurement occasion, it may be sensible to argue temporal precedence of the variables in a causal chain given the chronological nature of the constructs. Researchers should be mindful of potential retrospective reporting bias in these cases, however.”</a:t>
+            </a:r>
+            <a:endParaRPr lang="en-US" sz="3400" dirty="0"/>
+          </a:p>
+          <a:p>
+            <a:endParaRPr lang="en-US" dirty="0"/>
+          </a:p>
+        </p:txBody>
+      </p:sp>
+    </p:spTree>
+    <p:extLst>
+      <p:ext uri="{BB962C8B-B14F-4D97-AF65-F5344CB8AC3E}">
+        <p14:creationId xmlns:p14="http://schemas.microsoft.com/office/powerpoint/2010/main" val="1316173624"/>
+      </p:ext>
+    </p:extLst>
+  </p:cSld>
+  <p:clrMapOvr>
+    <a:masterClrMapping/>
+  </p:clrMapOvr>
+</p:sld>
+</file>
+
+<file path=ppt/slides/slide3.xml><?xml version="1.0" encoding="utf-8"?>
 <p:sld xmlns:a="http://schemas.openxmlformats.org/drawingml/2006/main" xmlns:r="http://schemas.openxmlformats.org/officeDocument/2006/relationships" xmlns:p="http://schemas.openxmlformats.org/presentationml/2006/main">
   <p:cSld>
     <p:spTree>
@@ -8243,1893 +10541,7 @@
 </p:sld>
 </file>
 
-<file path=ppt/slides/slide20.xml><?xml version="1.0" encoding="utf-8"?>
-<p:sld xmlns:a="http://schemas.openxmlformats.org/drawingml/2006/main" xmlns:r="http://schemas.openxmlformats.org/officeDocument/2006/relationships" xmlns:p="http://schemas.openxmlformats.org/presentationml/2006/main">
-  <p:cSld>
-    <p:spTree>
-      <p:nvGrpSpPr>
-        <p:cNvPr id="1" name=""/>
-        <p:cNvGrpSpPr/>
-        <p:nvPr/>
-      </p:nvGrpSpPr>
-      <p:grpSpPr>
-        <a:xfrm>
-          <a:off x="0" y="0"/>
-          <a:ext cx="0" cy="0"/>
-          <a:chOff x="0" y="0"/>
-          <a:chExt cx="0" cy="0"/>
-        </a:xfrm>
-      </p:grpSpPr>
-      <p:sp>
-        <p:nvSpPr>
-          <p:cNvPr id="2" name="Title 1"/>
-          <p:cNvSpPr>
-            <a:spLocks noGrp="1"/>
-          </p:cNvSpPr>
-          <p:nvPr>
-            <p:ph type="title"/>
-          </p:nvPr>
-        </p:nvSpPr>
-        <p:spPr/>
-        <p:txBody>
-          <a:bodyPr/>
-          <a:lstStyle/>
-          <a:p>
-            <a:r>
-              <a:rPr lang="en-US" dirty="0"/>
-              <a:t>Baron &amp; Kenny, (1986) </a:t>
-            </a:r>
-          </a:p>
-        </p:txBody>
-      </p:sp>
-      <p:sp>
-        <p:nvSpPr>
-          <p:cNvPr id="3" name="Content Placeholder 2"/>
-          <p:cNvSpPr>
-            <a:spLocks noGrp="1"/>
-          </p:cNvSpPr>
-          <p:nvPr>
-            <p:ph idx="1"/>
-          </p:nvPr>
-        </p:nvSpPr>
-        <p:spPr>
-          <a:xfrm>
-            <a:off x="986971" y="1600200"/>
-            <a:ext cx="4093029" cy="4724400"/>
-          </a:xfrm>
-        </p:spPr>
-        <p:txBody>
-          <a:bodyPr>
-            <a:normAutofit/>
-          </a:bodyPr>
-          <a:lstStyle/>
-          <a:p>
-            <a:r>
-              <a:rPr lang="en-GB" sz="3700" dirty="0"/>
-              <a:t>Four conditions of mediation: </a:t>
-            </a:r>
-          </a:p>
-          <a:p>
-            <a:pPr marL="457200" lvl="1" indent="0">
-              <a:buNone/>
-            </a:pPr>
-            <a:r>
-              <a:rPr lang="en-GB" sz="3700" dirty="0"/>
-              <a:t>3. The mediator must significantly predict the outcome variable.</a:t>
-            </a:r>
-          </a:p>
-          <a:p>
-            <a:endParaRPr lang="en-US" sz="3200" dirty="0"/>
-          </a:p>
-        </p:txBody>
-      </p:sp>
-      <p:pic>
-        <p:nvPicPr>
-          <p:cNvPr id="4" name="Picture 3">
-            <a:extLst>
-              <a:ext uri="{FF2B5EF4-FFF2-40B4-BE49-F238E27FC236}">
-                <a16:creationId xmlns:a16="http://schemas.microsoft.com/office/drawing/2014/main" id="{072B4491-614C-8242-A1CF-4F5BF9741262}"/>
-              </a:ext>
-            </a:extLst>
-          </p:cNvPr>
-          <p:cNvPicPr>
-            <a:picLocks noChangeAspect="1"/>
-          </p:cNvPicPr>
-          <p:nvPr/>
-        </p:nvPicPr>
-        <p:blipFill>
-          <a:blip r:embed="rId2">
-            <a:extLst>
-              <a:ext uri="{28A0092B-C50C-407E-A947-70E740481C1C}">
-                <a14:useLocalDpi xmlns:a14="http://schemas.microsoft.com/office/drawing/2010/main" val="0"/>
-              </a:ext>
-            </a:extLst>
-          </a:blip>
-          <a:stretch>
-            <a:fillRect/>
-          </a:stretch>
-        </p:blipFill>
-        <p:spPr>
-          <a:xfrm>
-            <a:off x="5452042" y="1556657"/>
-            <a:ext cx="5616802" cy="4629020"/>
-          </a:xfrm>
-          <a:prstGeom prst="rect">
-            <a:avLst/>
-          </a:prstGeom>
-        </p:spPr>
-      </p:pic>
-      <p:cxnSp>
-        <p:nvCxnSpPr>
-          <p:cNvPr id="5" name="Straight Arrow Connector 4">
-            <a:extLst>
-              <a:ext uri="{FF2B5EF4-FFF2-40B4-BE49-F238E27FC236}">
-                <a16:creationId xmlns:a16="http://schemas.microsoft.com/office/drawing/2014/main" id="{ADC6FB27-A299-3245-8F0B-3CA5054E7A00}"/>
-              </a:ext>
-            </a:extLst>
-          </p:cNvPr>
-          <p:cNvCxnSpPr>
-            <a:cxnSpLocks/>
-          </p:cNvCxnSpPr>
-          <p:nvPr/>
-        </p:nvCxnSpPr>
-        <p:spPr>
-          <a:xfrm>
-            <a:off x="9269073" y="4085771"/>
-            <a:ext cx="876413" cy="856343"/>
-          </a:xfrm>
-          <a:prstGeom prst="straightConnector1">
-            <a:avLst/>
-          </a:prstGeom>
-          <a:ln w="76200">
-            <a:solidFill>
-              <a:srgbClr val="FF0000"/>
-            </a:solidFill>
-            <a:tailEnd type="triangle"/>
-          </a:ln>
-        </p:spPr>
-        <p:style>
-          <a:lnRef idx="1">
-            <a:schemeClr val="accent1"/>
-          </a:lnRef>
-          <a:fillRef idx="0">
-            <a:schemeClr val="accent1"/>
-          </a:fillRef>
-          <a:effectRef idx="0">
-            <a:schemeClr val="accent1"/>
-          </a:effectRef>
-          <a:fontRef idx="minor">
-            <a:schemeClr val="tx1"/>
-          </a:fontRef>
-        </p:style>
-      </p:cxnSp>
-      <mc:AlternateContent xmlns:mc="http://schemas.openxmlformats.org/markup-compatibility/2006">
-        <mc:Choice xmlns:p14="http://schemas.microsoft.com/office/powerpoint/2010/main" Requires="p14">
-          <p:contentPart p14:bwMode="auto" r:id="rId3">
-            <p14:nvContentPartPr>
-              <p14:cNvPr id="6" name="Ink 5">
-                <a:extLst>
-                  <a:ext uri="{FF2B5EF4-FFF2-40B4-BE49-F238E27FC236}">
-                    <a16:creationId xmlns:a16="http://schemas.microsoft.com/office/drawing/2014/main" id="{7BA191A3-1B3B-BE8E-F371-526025798163}"/>
-                  </a:ext>
-                </a:extLst>
-              </p14:cNvPr>
-              <p14:cNvContentPartPr/>
-              <p14:nvPr/>
-            </p14:nvContentPartPr>
-            <p14:xfrm>
-              <a:off x="9619920" y="4280040"/>
-              <a:ext cx="521280" cy="343080"/>
-            </p14:xfrm>
-          </p:contentPart>
-        </mc:Choice>
-        <mc:Fallback>
-          <p:pic>
-            <p:nvPicPr>
-              <p:cNvPr id="6" name="Ink 5">
-                <a:extLst>
-                  <a:ext uri="{FF2B5EF4-FFF2-40B4-BE49-F238E27FC236}">
-                    <a16:creationId xmlns:a16="http://schemas.microsoft.com/office/drawing/2014/main" id="{7BA191A3-1B3B-BE8E-F371-526025798163}"/>
-                  </a:ext>
-                </a:extLst>
-              </p:cNvPr>
-              <p:cNvPicPr/>
-              <p:nvPr/>
-            </p:nvPicPr>
-            <p:blipFill>
-              <a:blip r:embed="rId4"/>
-              <a:stretch>
-                <a:fillRect/>
-              </a:stretch>
-            </p:blipFill>
-            <p:spPr>
-              <a:xfrm>
-                <a:off x="9610560" y="4270680"/>
-                <a:ext cx="540000" cy="361800"/>
-              </a:xfrm>
-              <a:prstGeom prst="rect">
-                <a:avLst/>
-              </a:prstGeom>
-            </p:spPr>
-          </p:pic>
-        </mc:Fallback>
-      </mc:AlternateContent>
-    </p:spTree>
-    <p:extLst>
-      <p:ext uri="{BB962C8B-B14F-4D97-AF65-F5344CB8AC3E}">
-        <p14:creationId xmlns:p14="http://schemas.microsoft.com/office/powerpoint/2010/main" val="2844678668"/>
-      </p:ext>
-    </p:extLst>
-  </p:cSld>
-  <p:clrMapOvr>
-    <a:masterClrMapping/>
-  </p:clrMapOvr>
-  <p:timing>
-    <p:tnLst>
-      <p:par>
-        <p:cTn id="1" dur="indefinite" restart="never" nodeType="tmRoot">
-          <p:childTnLst>
-            <p:seq concurrent="1" nextAc="seek">
-              <p:cTn id="2" dur="indefinite" nodeType="mainSeq">
-                <p:childTnLst>
-                  <p:par>
-                    <p:cTn id="3" fill="hold">
-                      <p:stCondLst>
-                        <p:cond delay="indefinite"/>
-                      </p:stCondLst>
-                      <p:childTnLst>
-                        <p:par>
-                          <p:cTn id="4" fill="hold">
-                            <p:stCondLst>
-                              <p:cond delay="0"/>
-                            </p:stCondLst>
-                            <p:childTnLst>
-                              <p:par>
-                                <p:cTn id="5" presetID="1" presetClass="entr" presetSubtype="0" fill="hold" nodeType="clickEffect">
-                                  <p:stCondLst>
-                                    <p:cond delay="0"/>
-                                  </p:stCondLst>
-                                  <p:childTnLst>
-                                    <p:set>
-                                      <p:cBhvr>
-                                        <p:cTn id="6" dur="1" fill="hold">
-                                          <p:stCondLst>
-                                            <p:cond delay="0"/>
-                                          </p:stCondLst>
-                                        </p:cTn>
-                                        <p:tgtEl>
-                                          <p:spTgt spid="5"/>
-                                        </p:tgtEl>
-                                        <p:attrNameLst>
-                                          <p:attrName>style.visibility</p:attrName>
-                                        </p:attrNameLst>
-                                      </p:cBhvr>
-                                      <p:to>
-                                        <p:strVal val="visible"/>
-                                      </p:to>
-                                    </p:set>
-                                  </p:childTnLst>
-                                </p:cTn>
-                              </p:par>
-                            </p:childTnLst>
-                          </p:cTn>
-                        </p:par>
-                      </p:childTnLst>
-                    </p:cTn>
-                  </p:par>
-                </p:childTnLst>
-              </p:cTn>
-              <p:prevCondLst>
-                <p:cond evt="onPrev" delay="0">
-                  <p:tgtEl>
-                    <p:sldTgt/>
-                  </p:tgtEl>
-                </p:cond>
-              </p:prevCondLst>
-              <p:nextCondLst>
-                <p:cond evt="onNext" delay="0">
-                  <p:tgtEl>
-                    <p:sldTgt/>
-                  </p:tgtEl>
-                </p:cond>
-              </p:nextCondLst>
-            </p:seq>
-          </p:childTnLst>
-        </p:cTn>
-      </p:par>
-    </p:tnLst>
-  </p:timing>
-</p:sld>
-</file>
-
-<file path=ppt/slides/slide21.xml><?xml version="1.0" encoding="utf-8"?>
-<p:sld xmlns:a="http://schemas.openxmlformats.org/drawingml/2006/main" xmlns:r="http://schemas.openxmlformats.org/officeDocument/2006/relationships" xmlns:p="http://schemas.openxmlformats.org/presentationml/2006/main">
-  <p:cSld>
-    <p:spTree>
-      <p:nvGrpSpPr>
-        <p:cNvPr id="1" name=""/>
-        <p:cNvGrpSpPr/>
-        <p:nvPr/>
-      </p:nvGrpSpPr>
-      <p:grpSpPr>
-        <a:xfrm>
-          <a:off x="0" y="0"/>
-          <a:ext cx="0" cy="0"/>
-          <a:chOff x="0" y="0"/>
-          <a:chExt cx="0" cy="0"/>
-        </a:xfrm>
-      </p:grpSpPr>
-      <p:sp>
-        <p:nvSpPr>
-          <p:cNvPr id="2" name="Title 1"/>
-          <p:cNvSpPr>
-            <a:spLocks noGrp="1"/>
-          </p:cNvSpPr>
-          <p:nvPr>
-            <p:ph type="title"/>
-          </p:nvPr>
-        </p:nvSpPr>
-        <p:spPr/>
-        <p:txBody>
-          <a:bodyPr/>
-          <a:lstStyle/>
-          <a:p>
-            <a:r>
-              <a:rPr lang="en-US" dirty="0"/>
-              <a:t>Baron &amp; Kenny, (1986) </a:t>
-            </a:r>
-          </a:p>
-        </p:txBody>
-      </p:sp>
-      <p:sp>
-        <p:nvSpPr>
-          <p:cNvPr id="3" name="Content Placeholder 2"/>
-          <p:cNvSpPr>
-            <a:spLocks noGrp="1"/>
-          </p:cNvSpPr>
-          <p:nvPr>
-            <p:ph idx="1"/>
-          </p:nvPr>
-        </p:nvSpPr>
-        <p:spPr>
-          <a:xfrm>
-            <a:off x="986971" y="1600200"/>
-            <a:ext cx="4093029" cy="4724400"/>
-          </a:xfrm>
-        </p:spPr>
-        <p:txBody>
-          <a:bodyPr>
-            <a:normAutofit lnSpcReduction="10000"/>
-          </a:bodyPr>
-          <a:lstStyle/>
-          <a:p>
-            <a:r>
-              <a:rPr lang="en-GB" sz="3700" dirty="0"/>
-              <a:t>Four conditions of mediation: </a:t>
-            </a:r>
-          </a:p>
-          <a:p>
-            <a:pPr marL="457200" lvl="1" indent="0">
-              <a:buNone/>
-            </a:pPr>
-            <a:r>
-              <a:rPr lang="en-GB" sz="3700" dirty="0"/>
-              <a:t>4. The predictor variable must predict the outcome variable less strongly in model 3 than in model 1.</a:t>
-            </a:r>
-          </a:p>
-          <a:p>
-            <a:endParaRPr lang="en-US" sz="3200" dirty="0"/>
-          </a:p>
-        </p:txBody>
-      </p:sp>
-      <p:pic>
-        <p:nvPicPr>
-          <p:cNvPr id="4" name="Picture 3">
-            <a:extLst>
-              <a:ext uri="{FF2B5EF4-FFF2-40B4-BE49-F238E27FC236}">
-                <a16:creationId xmlns:a16="http://schemas.microsoft.com/office/drawing/2014/main" id="{072B4491-614C-8242-A1CF-4F5BF9741262}"/>
-              </a:ext>
-            </a:extLst>
-          </p:cNvPr>
-          <p:cNvPicPr>
-            <a:picLocks noChangeAspect="1"/>
-          </p:cNvPicPr>
-          <p:nvPr/>
-        </p:nvPicPr>
-        <p:blipFill>
-          <a:blip r:embed="rId2">
-            <a:extLst>
-              <a:ext uri="{28A0092B-C50C-407E-A947-70E740481C1C}">
-                <a14:useLocalDpi xmlns:a14="http://schemas.microsoft.com/office/drawing/2010/main" val="0"/>
-              </a:ext>
-            </a:extLst>
-          </a:blip>
-          <a:stretch>
-            <a:fillRect/>
-          </a:stretch>
-        </p:blipFill>
-        <p:spPr>
-          <a:xfrm>
-            <a:off x="5452042" y="1556657"/>
-            <a:ext cx="5616802" cy="4629020"/>
-          </a:xfrm>
-          <a:prstGeom prst="rect">
-            <a:avLst/>
-          </a:prstGeom>
-        </p:spPr>
-      </p:pic>
-      <p:cxnSp>
-        <p:nvCxnSpPr>
-          <p:cNvPr id="5" name="Straight Arrow Connector 4">
-            <a:extLst>
-              <a:ext uri="{FF2B5EF4-FFF2-40B4-BE49-F238E27FC236}">
-                <a16:creationId xmlns:a16="http://schemas.microsoft.com/office/drawing/2014/main" id="{D14AB6C8-78E1-DE44-993C-D1CF954CD649}"/>
-              </a:ext>
-            </a:extLst>
-          </p:cNvPr>
-          <p:cNvCxnSpPr/>
-          <p:nvPr/>
-        </p:nvCxnSpPr>
-        <p:spPr>
-          <a:xfrm>
-            <a:off x="7460343" y="5152571"/>
-            <a:ext cx="1799771" cy="0"/>
-          </a:xfrm>
-          <a:prstGeom prst="straightConnector1">
-            <a:avLst/>
-          </a:prstGeom>
-          <a:ln w="76200">
-            <a:solidFill>
-              <a:schemeClr val="accent1"/>
-            </a:solidFill>
-            <a:tailEnd type="triangle"/>
-          </a:ln>
-        </p:spPr>
-        <p:style>
-          <a:lnRef idx="1">
-            <a:schemeClr val="accent1"/>
-          </a:lnRef>
-          <a:fillRef idx="0">
-            <a:schemeClr val="accent1"/>
-          </a:fillRef>
-          <a:effectRef idx="0">
-            <a:schemeClr val="accent1"/>
-          </a:effectRef>
-          <a:fontRef idx="minor">
-            <a:schemeClr val="tx1"/>
-          </a:fontRef>
-        </p:style>
-      </p:cxnSp>
-      <p:cxnSp>
-        <p:nvCxnSpPr>
-          <p:cNvPr id="6" name="Straight Arrow Connector 5">
-            <a:extLst>
-              <a:ext uri="{FF2B5EF4-FFF2-40B4-BE49-F238E27FC236}">
-                <a16:creationId xmlns:a16="http://schemas.microsoft.com/office/drawing/2014/main" id="{82953B9A-CD3A-5447-BFE8-E815ABB07701}"/>
-              </a:ext>
-            </a:extLst>
-          </p:cNvPr>
-          <p:cNvCxnSpPr>
-            <a:cxnSpLocks/>
-          </p:cNvCxnSpPr>
-          <p:nvPr/>
-        </p:nvCxnSpPr>
-        <p:spPr>
-          <a:xfrm>
-            <a:off x="9269073" y="4085771"/>
-            <a:ext cx="876413" cy="856343"/>
-          </a:xfrm>
-          <a:prstGeom prst="straightConnector1">
-            <a:avLst/>
-          </a:prstGeom>
-          <a:ln w="76200">
-            <a:solidFill>
-              <a:srgbClr val="FF0000"/>
-            </a:solidFill>
-            <a:tailEnd type="triangle"/>
-          </a:ln>
-        </p:spPr>
-        <p:style>
-          <a:lnRef idx="1">
-            <a:schemeClr val="accent1"/>
-          </a:lnRef>
-          <a:fillRef idx="0">
-            <a:schemeClr val="accent1"/>
-          </a:fillRef>
-          <a:effectRef idx="0">
-            <a:schemeClr val="accent1"/>
-          </a:effectRef>
-          <a:fontRef idx="minor">
-            <a:schemeClr val="tx1"/>
-          </a:fontRef>
-        </p:style>
-      </p:cxnSp>
-      <mc:AlternateContent xmlns:mc="http://schemas.openxmlformats.org/markup-compatibility/2006">
-        <mc:Choice xmlns:p14="http://schemas.microsoft.com/office/powerpoint/2010/main" Requires="p14">
-          <p:contentPart p14:bwMode="auto" r:id="rId3">
-            <p14:nvContentPartPr>
-              <p14:cNvPr id="7" name="Ink 6">
-                <a:extLst>
-                  <a:ext uri="{FF2B5EF4-FFF2-40B4-BE49-F238E27FC236}">
-                    <a16:creationId xmlns:a16="http://schemas.microsoft.com/office/drawing/2014/main" id="{EAD92767-1707-A018-49C3-AFE3E5B81883}"/>
-                  </a:ext>
-                </a:extLst>
-              </p14:cNvPr>
-              <p14:cNvContentPartPr/>
-              <p14:nvPr/>
-            </p14:nvContentPartPr>
-            <p14:xfrm>
-              <a:off x="8115480" y="2234520"/>
-              <a:ext cx="628920" cy="3366720"/>
-            </p14:xfrm>
-          </p:contentPart>
-        </mc:Choice>
-        <mc:Fallback>
-          <p:pic>
-            <p:nvPicPr>
-              <p:cNvPr id="7" name="Ink 6">
-                <a:extLst>
-                  <a:ext uri="{FF2B5EF4-FFF2-40B4-BE49-F238E27FC236}">
-                    <a16:creationId xmlns:a16="http://schemas.microsoft.com/office/drawing/2014/main" id="{EAD92767-1707-A018-49C3-AFE3E5B81883}"/>
-                  </a:ext>
-                </a:extLst>
-              </p:cNvPr>
-              <p:cNvPicPr/>
-              <p:nvPr/>
-            </p:nvPicPr>
-            <p:blipFill>
-              <a:blip r:embed="rId4"/>
-              <a:stretch>
-                <a:fillRect/>
-              </a:stretch>
-            </p:blipFill>
-            <p:spPr>
-              <a:xfrm>
-                <a:off x="8106120" y="2225160"/>
-                <a:ext cx="647640" cy="3385440"/>
-              </a:xfrm>
-              <a:prstGeom prst="rect">
-                <a:avLst/>
-              </a:prstGeom>
-            </p:spPr>
-          </p:pic>
-        </mc:Fallback>
-      </mc:AlternateContent>
-    </p:spTree>
-    <p:extLst>
-      <p:ext uri="{BB962C8B-B14F-4D97-AF65-F5344CB8AC3E}">
-        <p14:creationId xmlns:p14="http://schemas.microsoft.com/office/powerpoint/2010/main" val="455499502"/>
-      </p:ext>
-    </p:extLst>
-  </p:cSld>
-  <p:clrMapOvr>
-    <a:masterClrMapping/>
-  </p:clrMapOvr>
-</p:sld>
-</file>
-
-<file path=ppt/slides/slide22.xml><?xml version="1.0" encoding="utf-8"?>
-<p:sld xmlns:a="http://schemas.openxmlformats.org/drawingml/2006/main" xmlns:r="http://schemas.openxmlformats.org/officeDocument/2006/relationships" xmlns:p="http://schemas.openxmlformats.org/presentationml/2006/main">
-  <p:cSld>
-    <p:spTree>
-      <p:nvGrpSpPr>
-        <p:cNvPr id="1" name=""/>
-        <p:cNvGrpSpPr/>
-        <p:nvPr/>
-      </p:nvGrpSpPr>
-      <p:grpSpPr>
-        <a:xfrm>
-          <a:off x="0" y="0"/>
-          <a:ext cx="0" cy="0"/>
-          <a:chOff x="0" y="0"/>
-          <a:chExt cx="0" cy="0"/>
-        </a:xfrm>
-      </p:grpSpPr>
-      <p:sp>
-        <p:nvSpPr>
-          <p:cNvPr id="2" name="Title 1"/>
-          <p:cNvSpPr>
-            <a:spLocks noGrp="1"/>
-          </p:cNvSpPr>
-          <p:nvPr>
-            <p:ph type="title"/>
-          </p:nvPr>
-        </p:nvSpPr>
-        <p:spPr/>
-        <p:txBody>
-          <a:bodyPr/>
-          <a:lstStyle/>
-          <a:p>
-            <a:r>
-              <a:rPr lang="en-US" dirty="0"/>
-              <a:t>Baron &amp; Kenny, (1986) </a:t>
-            </a:r>
-          </a:p>
-        </p:txBody>
-      </p:sp>
-      <p:sp>
-        <p:nvSpPr>
-          <p:cNvPr id="3" name="Content Placeholder 2"/>
-          <p:cNvSpPr>
-            <a:spLocks noGrp="1"/>
-          </p:cNvSpPr>
-          <p:nvPr>
-            <p:ph idx="1"/>
-          </p:nvPr>
-        </p:nvSpPr>
-        <p:spPr>
-          <a:xfrm>
-            <a:off x="986971" y="1600200"/>
-            <a:ext cx="4093029" cy="4724400"/>
-          </a:xfrm>
-        </p:spPr>
-        <p:txBody>
-          <a:bodyPr>
-            <a:normAutofit lnSpcReduction="10000"/>
-          </a:bodyPr>
-          <a:lstStyle/>
-          <a:p>
-            <a:r>
-              <a:rPr lang="en-GB" sz="3700" dirty="0"/>
-              <a:t>Four conditions of mediation: </a:t>
-            </a:r>
-          </a:p>
-          <a:p>
-            <a:pPr marL="457200" lvl="1" indent="0">
-              <a:buNone/>
-            </a:pPr>
-            <a:r>
-              <a:rPr lang="en-GB" sz="3700" dirty="0"/>
-              <a:t>4. The predictor variable must predict the outcome variable less strongly in model 3 than in model 1.</a:t>
-            </a:r>
-          </a:p>
-          <a:p>
-            <a:endParaRPr lang="en-US" sz="3200" dirty="0"/>
-          </a:p>
-        </p:txBody>
-      </p:sp>
-      <p:pic>
-        <p:nvPicPr>
-          <p:cNvPr id="4" name="Picture 3">
-            <a:extLst>
-              <a:ext uri="{FF2B5EF4-FFF2-40B4-BE49-F238E27FC236}">
-                <a16:creationId xmlns:a16="http://schemas.microsoft.com/office/drawing/2014/main" id="{072B4491-614C-8242-A1CF-4F5BF9741262}"/>
-              </a:ext>
-            </a:extLst>
-          </p:cNvPr>
-          <p:cNvPicPr>
-            <a:picLocks noChangeAspect="1"/>
-          </p:cNvPicPr>
-          <p:nvPr/>
-        </p:nvPicPr>
-        <p:blipFill>
-          <a:blip r:embed="rId2">
-            <a:extLst>
-              <a:ext uri="{28A0092B-C50C-407E-A947-70E740481C1C}">
-                <a14:useLocalDpi xmlns:a14="http://schemas.microsoft.com/office/drawing/2010/main" val="0"/>
-              </a:ext>
-            </a:extLst>
-          </a:blip>
-          <a:stretch>
-            <a:fillRect/>
-          </a:stretch>
-        </p:blipFill>
-        <p:spPr>
-          <a:xfrm>
-            <a:off x="5452042" y="1556657"/>
-            <a:ext cx="5616802" cy="4629020"/>
-          </a:xfrm>
-          <a:prstGeom prst="rect">
-            <a:avLst/>
-          </a:prstGeom>
-        </p:spPr>
-      </p:pic>
-      <p:cxnSp>
-        <p:nvCxnSpPr>
-          <p:cNvPr id="5" name="Straight Arrow Connector 4">
-            <a:extLst>
-              <a:ext uri="{FF2B5EF4-FFF2-40B4-BE49-F238E27FC236}">
-                <a16:creationId xmlns:a16="http://schemas.microsoft.com/office/drawing/2014/main" id="{D14AB6C8-78E1-DE44-993C-D1CF954CD649}"/>
-              </a:ext>
-            </a:extLst>
-          </p:cNvPr>
-          <p:cNvCxnSpPr/>
-          <p:nvPr/>
-        </p:nvCxnSpPr>
-        <p:spPr>
-          <a:xfrm>
-            <a:off x="7460343" y="5152571"/>
-            <a:ext cx="1799771" cy="0"/>
-          </a:xfrm>
-          <a:prstGeom prst="straightConnector1">
-            <a:avLst/>
-          </a:prstGeom>
-          <a:ln w="76200">
-            <a:solidFill>
-              <a:srgbClr val="FF0000"/>
-            </a:solidFill>
-            <a:tailEnd type="triangle"/>
-          </a:ln>
-        </p:spPr>
-        <p:style>
-          <a:lnRef idx="1">
-            <a:schemeClr val="accent1"/>
-          </a:lnRef>
-          <a:fillRef idx="0">
-            <a:schemeClr val="accent1"/>
-          </a:fillRef>
-          <a:effectRef idx="0">
-            <a:schemeClr val="accent1"/>
-          </a:effectRef>
-          <a:fontRef idx="minor">
-            <a:schemeClr val="tx1"/>
-          </a:fontRef>
-        </p:style>
-      </p:cxnSp>
-    </p:spTree>
-    <p:extLst>
-      <p:ext uri="{BB962C8B-B14F-4D97-AF65-F5344CB8AC3E}">
-        <p14:creationId xmlns:p14="http://schemas.microsoft.com/office/powerpoint/2010/main" val="1677733616"/>
-      </p:ext>
-    </p:extLst>
-  </p:cSld>
-  <p:clrMapOvr>
-    <a:masterClrMapping/>
-  </p:clrMapOvr>
-</p:sld>
-</file>
-
-<file path=ppt/slides/slide23.xml><?xml version="1.0" encoding="utf-8"?>
-<p:sld xmlns:a="http://schemas.openxmlformats.org/drawingml/2006/main" xmlns:r="http://schemas.openxmlformats.org/officeDocument/2006/relationships" xmlns:p="http://schemas.openxmlformats.org/presentationml/2006/main">
-  <p:cSld>
-    <p:spTree>
-      <p:nvGrpSpPr>
-        <p:cNvPr id="1" name=""/>
-        <p:cNvGrpSpPr/>
-        <p:nvPr/>
-      </p:nvGrpSpPr>
-      <p:grpSpPr>
-        <a:xfrm>
-          <a:off x="0" y="0"/>
-          <a:ext cx="0" cy="0"/>
-          <a:chOff x="0" y="0"/>
-          <a:chExt cx="0" cy="0"/>
-        </a:xfrm>
-      </p:grpSpPr>
-      <p:sp>
-        <p:nvSpPr>
-          <p:cNvPr id="2" name="Title 1"/>
-          <p:cNvSpPr>
-            <a:spLocks noGrp="1"/>
-          </p:cNvSpPr>
-          <p:nvPr>
-            <p:ph type="title"/>
-          </p:nvPr>
-        </p:nvSpPr>
-        <p:spPr/>
-        <p:txBody>
-          <a:bodyPr/>
-          <a:lstStyle/>
-          <a:p>
-            <a:r>
-              <a:rPr lang="en-US" dirty="0"/>
-              <a:t>Limitations of Baron &amp; Kenny’s (1986) approach</a:t>
-            </a:r>
-          </a:p>
-        </p:txBody>
-      </p:sp>
-      <p:sp>
-        <p:nvSpPr>
-          <p:cNvPr id="3" name="Content Placeholder 2"/>
-          <p:cNvSpPr>
-            <a:spLocks noGrp="1"/>
-          </p:cNvSpPr>
-          <p:nvPr>
-            <p:ph idx="1"/>
-          </p:nvPr>
-        </p:nvSpPr>
-        <p:spPr/>
-        <p:txBody>
-          <a:bodyPr/>
-          <a:lstStyle/>
-          <a:p>
-            <a:r>
-              <a:rPr lang="en-GB" sz="3200" dirty="0"/>
-              <a:t>How much of a reduction in the relationship between the predictor and outcome is necessary to infer mediation? </a:t>
-            </a:r>
-          </a:p>
-          <a:p>
-            <a:pPr lvl="1"/>
-            <a:r>
-              <a:rPr lang="en-GB" sz="3200" dirty="0"/>
-              <a:t>people tend to look for a change in significance, which can lead to the ‘all or nothing’ thinking that </a:t>
-            </a:r>
-            <a:r>
-              <a:rPr lang="en-GB" sz="3200" i="1" dirty="0"/>
-              <a:t>p</a:t>
-            </a:r>
-            <a:r>
-              <a:rPr lang="en-GB" sz="3200" dirty="0"/>
-              <a:t>-values encourage (Field) </a:t>
-            </a:r>
-          </a:p>
-          <a:p>
-            <a:pPr marL="457200" lvl="1" indent="0">
-              <a:buNone/>
-            </a:pPr>
-            <a:endParaRPr lang="en-GB" sz="3200" dirty="0"/>
-          </a:p>
-          <a:p>
-            <a:pPr lvl="1"/>
-            <a:r>
-              <a:rPr lang="en-GB" sz="3200" dirty="0"/>
-              <a:t>Never a good idea to run multiple significance tests</a:t>
-            </a:r>
-          </a:p>
-          <a:p>
-            <a:pPr lvl="1"/>
-            <a:r>
-              <a:rPr lang="en-GB" sz="3200" dirty="0"/>
-              <a:t>This approach only tells you if there is a significant mediation, not how large (Hayes)</a:t>
-            </a:r>
-          </a:p>
-          <a:p>
-            <a:pPr lvl="1"/>
-            <a:endParaRPr lang="en-GB" sz="3200" dirty="0"/>
-          </a:p>
-          <a:p>
-            <a:endParaRPr lang="en-US" dirty="0"/>
-          </a:p>
-        </p:txBody>
-      </p:sp>
-    </p:spTree>
-    <p:extLst>
-      <p:ext uri="{BB962C8B-B14F-4D97-AF65-F5344CB8AC3E}">
-        <p14:creationId xmlns:p14="http://schemas.microsoft.com/office/powerpoint/2010/main" val="3012827407"/>
-      </p:ext>
-    </p:extLst>
-  </p:cSld>
-  <p:clrMapOvr>
-    <a:masterClrMapping/>
-  </p:clrMapOvr>
-  <p:timing>
-    <p:tnLst>
-      <p:par>
-        <p:cTn id="1" dur="indefinite" restart="never" nodeType="tmRoot">
-          <p:childTnLst>
-            <p:seq concurrent="1" nextAc="seek">
-              <p:cTn id="2" dur="indefinite" nodeType="mainSeq">
-                <p:childTnLst>
-                  <p:par>
-                    <p:cTn id="3" fill="hold">
-                      <p:stCondLst>
-                        <p:cond delay="indefinite"/>
-                      </p:stCondLst>
-                      <p:childTnLst>
-                        <p:par>
-                          <p:cTn id="4" fill="hold">
-                            <p:stCondLst>
-                              <p:cond delay="0"/>
-                            </p:stCondLst>
-                            <p:childTnLst>
-                              <p:par>
-                                <p:cTn id="5" presetID="1" presetClass="entr" presetSubtype="0" fill="hold" grpId="0" nodeType="clickEffect">
-                                  <p:stCondLst>
-                                    <p:cond delay="0"/>
-                                  </p:stCondLst>
-                                  <p:childTnLst>
-                                    <p:set>
-                                      <p:cBhvr>
-                                        <p:cTn id="6" dur="1" fill="hold">
-                                          <p:stCondLst>
-                                            <p:cond delay="0"/>
-                                          </p:stCondLst>
-                                        </p:cTn>
-                                        <p:tgtEl>
-                                          <p:spTgt spid="3">
-                                            <p:txEl>
-                                              <p:pRg st="0" end="0"/>
-                                            </p:txEl>
-                                          </p:spTgt>
-                                        </p:tgtEl>
-                                        <p:attrNameLst>
-                                          <p:attrName>style.visibility</p:attrName>
-                                        </p:attrNameLst>
-                                      </p:cBhvr>
-                                      <p:to>
-                                        <p:strVal val="visible"/>
-                                      </p:to>
-                                    </p:set>
-                                  </p:childTnLst>
-                                </p:cTn>
-                              </p:par>
-                              <p:par>
-                                <p:cTn id="7" presetID="1" presetClass="entr" presetSubtype="0" fill="hold" grpId="0" nodeType="withEffect">
-                                  <p:stCondLst>
-                                    <p:cond delay="0"/>
-                                  </p:stCondLst>
-                                  <p:childTnLst>
-                                    <p:set>
-                                      <p:cBhvr>
-                                        <p:cTn id="8" dur="1" fill="hold">
-                                          <p:stCondLst>
-                                            <p:cond delay="0"/>
-                                          </p:stCondLst>
-                                        </p:cTn>
-                                        <p:tgtEl>
-                                          <p:spTgt spid="3">
-                                            <p:txEl>
-                                              <p:pRg st="1" end="1"/>
-                                            </p:txEl>
-                                          </p:spTgt>
-                                        </p:tgtEl>
-                                        <p:attrNameLst>
-                                          <p:attrName>style.visibility</p:attrName>
-                                        </p:attrNameLst>
-                                      </p:cBhvr>
-                                      <p:to>
-                                        <p:strVal val="visible"/>
-                                      </p:to>
-                                    </p:set>
-                                  </p:childTnLst>
-                                </p:cTn>
-                              </p:par>
-                            </p:childTnLst>
-                          </p:cTn>
-                        </p:par>
-                      </p:childTnLst>
-                    </p:cTn>
-                  </p:par>
-                  <p:par>
-                    <p:cTn id="9" fill="hold">
-                      <p:stCondLst>
-                        <p:cond delay="indefinite"/>
-                      </p:stCondLst>
-                      <p:childTnLst>
-                        <p:par>
-                          <p:cTn id="10" fill="hold">
-                            <p:stCondLst>
-                              <p:cond delay="0"/>
-                            </p:stCondLst>
-                            <p:childTnLst>
-                              <p:par>
-                                <p:cTn id="11" presetID="1" presetClass="entr" presetSubtype="0" fill="hold" grpId="0" nodeType="clickEffect">
-                                  <p:stCondLst>
-                                    <p:cond delay="0"/>
-                                  </p:stCondLst>
-                                  <p:childTnLst>
-                                    <p:set>
-                                      <p:cBhvr>
-                                        <p:cTn id="12" dur="1" fill="hold">
-                                          <p:stCondLst>
-                                            <p:cond delay="0"/>
-                                          </p:stCondLst>
-                                        </p:cTn>
-                                        <p:tgtEl>
-                                          <p:spTgt spid="3">
-                                            <p:txEl>
-                                              <p:pRg st="3" end="3"/>
-                                            </p:txEl>
-                                          </p:spTgt>
-                                        </p:tgtEl>
-                                        <p:attrNameLst>
-                                          <p:attrName>style.visibility</p:attrName>
-                                        </p:attrNameLst>
-                                      </p:cBhvr>
-                                      <p:to>
-                                        <p:strVal val="visible"/>
-                                      </p:to>
-                                    </p:set>
-                                  </p:childTnLst>
-                                </p:cTn>
-                              </p:par>
-                              <p:par>
-                                <p:cTn id="13" presetID="1" presetClass="entr" presetSubtype="0" fill="hold" grpId="0" nodeType="withEffect">
-                                  <p:stCondLst>
-                                    <p:cond delay="0"/>
-                                  </p:stCondLst>
-                                  <p:childTnLst>
-                                    <p:set>
-                                      <p:cBhvr>
-                                        <p:cTn id="14" dur="1" fill="hold">
-                                          <p:stCondLst>
-                                            <p:cond delay="0"/>
-                                          </p:stCondLst>
-                                        </p:cTn>
-                                        <p:tgtEl>
-                                          <p:spTgt spid="3">
-                                            <p:txEl>
-                                              <p:pRg st="4" end="4"/>
-                                            </p:txEl>
-                                          </p:spTgt>
-                                        </p:tgtEl>
-                                        <p:attrNameLst>
-                                          <p:attrName>style.visibility</p:attrName>
-                                        </p:attrNameLst>
-                                      </p:cBhvr>
-                                      <p:to>
-                                        <p:strVal val="visible"/>
-                                      </p:to>
-                                    </p:set>
-                                  </p:childTnLst>
-                                </p:cTn>
-                              </p:par>
-                            </p:childTnLst>
-                          </p:cTn>
-                        </p:par>
-                      </p:childTnLst>
-                    </p:cTn>
-                  </p:par>
-                </p:childTnLst>
-              </p:cTn>
-              <p:prevCondLst>
-                <p:cond evt="onPrev" delay="0">
-                  <p:tgtEl>
-                    <p:sldTgt/>
-                  </p:tgtEl>
-                </p:cond>
-              </p:prevCondLst>
-              <p:nextCondLst>
-                <p:cond evt="onNext" delay="0">
-                  <p:tgtEl>
-                    <p:sldTgt/>
-                  </p:tgtEl>
-                </p:cond>
-              </p:nextCondLst>
-            </p:seq>
-          </p:childTnLst>
-        </p:cTn>
-      </p:par>
-    </p:tnLst>
-    <p:bldLst>
-      <p:bldP spid="3" grpId="0" uiExpand="1" build="p"/>
-    </p:bldLst>
-  </p:timing>
-</p:sld>
-</file>
-
-<file path=ppt/slides/slide24.xml><?xml version="1.0" encoding="utf-8"?>
-<p:sld xmlns:a="http://schemas.openxmlformats.org/drawingml/2006/main" xmlns:r="http://schemas.openxmlformats.org/officeDocument/2006/relationships" xmlns:p="http://schemas.openxmlformats.org/presentationml/2006/main">
-  <p:cSld>
-    <p:spTree>
-      <p:nvGrpSpPr>
-        <p:cNvPr id="1" name=""/>
-        <p:cNvGrpSpPr/>
-        <p:nvPr/>
-      </p:nvGrpSpPr>
-      <p:grpSpPr>
-        <a:xfrm>
-          <a:off x="0" y="0"/>
-          <a:ext cx="0" cy="0"/>
-          <a:chOff x="0" y="0"/>
-          <a:chExt cx="0" cy="0"/>
-        </a:xfrm>
-      </p:grpSpPr>
-      <p:sp>
-        <p:nvSpPr>
-          <p:cNvPr id="2" name="Title 1"/>
-          <p:cNvSpPr>
-            <a:spLocks noGrp="1"/>
-          </p:cNvSpPr>
-          <p:nvPr>
-            <p:ph type="title"/>
-          </p:nvPr>
-        </p:nvSpPr>
-        <p:spPr/>
-        <p:txBody>
-          <a:bodyPr/>
-          <a:lstStyle/>
-          <a:p>
-            <a:r>
-              <a:rPr lang="en-US" dirty="0" err="1"/>
-              <a:t>Sobel</a:t>
-            </a:r>
-            <a:r>
-              <a:rPr lang="en-US" dirty="0"/>
-              <a:t> Test (</a:t>
-            </a:r>
-            <a:r>
-              <a:rPr lang="en-US" dirty="0" err="1"/>
-              <a:t>Sobel</a:t>
-            </a:r>
-            <a:r>
-              <a:rPr lang="en-US" dirty="0"/>
-              <a:t>, 1982)</a:t>
-            </a:r>
-          </a:p>
-        </p:txBody>
-      </p:sp>
-      <p:sp>
-        <p:nvSpPr>
-          <p:cNvPr id="3" name="Content Placeholder 2"/>
-          <p:cNvSpPr>
-            <a:spLocks noGrp="1"/>
-          </p:cNvSpPr>
-          <p:nvPr>
-            <p:ph idx="1"/>
-          </p:nvPr>
-        </p:nvSpPr>
-        <p:spPr/>
-        <p:txBody>
-          <a:bodyPr>
-            <a:normAutofit/>
-          </a:bodyPr>
-          <a:lstStyle/>
-          <a:p>
-            <a:r>
-              <a:rPr lang="en-GB" sz="3200" dirty="0"/>
-              <a:t>An alternative is to estimate the indirect effect and its significance using the </a:t>
-            </a:r>
-            <a:r>
-              <a:rPr lang="en-GB" sz="3200" b="1" dirty="0"/>
-              <a:t>Sobel test </a:t>
-            </a:r>
-            <a:r>
-              <a:rPr lang="en-GB" sz="3200" dirty="0"/>
-              <a:t>(Sobel, 1982). </a:t>
-            </a:r>
-          </a:p>
-          <a:p>
-            <a:endParaRPr lang="en-GB" sz="3200" dirty="0"/>
-          </a:p>
-          <a:p>
-            <a:r>
-              <a:rPr lang="en-GB" sz="3200" dirty="0"/>
-              <a:t>If the Sobel test is significant, there is significant mediation.</a:t>
-            </a:r>
-          </a:p>
-          <a:p>
-            <a:endParaRPr lang="en-GB" sz="3200" dirty="0"/>
-          </a:p>
-          <a:p>
-            <a:r>
-              <a:rPr lang="en-GB" sz="3200" dirty="0"/>
-              <a:t>Significance tests depend upon sample size.</a:t>
-            </a:r>
-            <a:endParaRPr lang="en-US" sz="3200" dirty="0"/>
-          </a:p>
-        </p:txBody>
-      </p:sp>
-    </p:spTree>
-    <p:extLst>
-      <p:ext uri="{BB962C8B-B14F-4D97-AF65-F5344CB8AC3E}">
-        <p14:creationId xmlns:p14="http://schemas.microsoft.com/office/powerpoint/2010/main" val="3218762647"/>
-      </p:ext>
-    </p:extLst>
-  </p:cSld>
-  <p:clrMapOvr>
-    <a:masterClrMapping/>
-  </p:clrMapOvr>
-  <p:timing>
-    <p:tnLst>
-      <p:par>
-        <p:cTn id="1" dur="indefinite" restart="never" nodeType="tmRoot">
-          <p:childTnLst>
-            <p:seq concurrent="1" nextAc="seek">
-              <p:cTn id="2" dur="indefinite" nodeType="mainSeq">
-                <p:childTnLst>
-                  <p:par>
-                    <p:cTn id="3" fill="hold">
-                      <p:stCondLst>
-                        <p:cond delay="indefinite"/>
-                      </p:stCondLst>
-                      <p:childTnLst>
-                        <p:par>
-                          <p:cTn id="4" fill="hold">
-                            <p:stCondLst>
-                              <p:cond delay="0"/>
-                            </p:stCondLst>
-                            <p:childTnLst>
-                              <p:par>
-                                <p:cTn id="5" presetID="1" presetClass="entr" presetSubtype="0" fill="hold" grpId="0" nodeType="clickEffect">
-                                  <p:stCondLst>
-                                    <p:cond delay="0"/>
-                                  </p:stCondLst>
-                                  <p:childTnLst>
-                                    <p:set>
-                                      <p:cBhvr>
-                                        <p:cTn id="6" dur="1" fill="hold">
-                                          <p:stCondLst>
-                                            <p:cond delay="0"/>
-                                          </p:stCondLst>
-                                        </p:cTn>
-                                        <p:tgtEl>
-                                          <p:spTgt spid="3">
-                                            <p:txEl>
-                                              <p:pRg st="0" end="0"/>
-                                            </p:txEl>
-                                          </p:spTgt>
-                                        </p:tgtEl>
-                                        <p:attrNameLst>
-                                          <p:attrName>style.visibility</p:attrName>
-                                        </p:attrNameLst>
-                                      </p:cBhvr>
-                                      <p:to>
-                                        <p:strVal val="visible"/>
-                                      </p:to>
-                                    </p:set>
-                                  </p:childTnLst>
-                                </p:cTn>
-                              </p:par>
-                            </p:childTnLst>
-                          </p:cTn>
-                        </p:par>
-                      </p:childTnLst>
-                    </p:cTn>
-                  </p:par>
-                  <p:par>
-                    <p:cTn id="7" fill="hold">
-                      <p:stCondLst>
-                        <p:cond delay="indefinite"/>
-                      </p:stCondLst>
-                      <p:childTnLst>
-                        <p:par>
-                          <p:cTn id="8" fill="hold">
-                            <p:stCondLst>
-                              <p:cond delay="0"/>
-                            </p:stCondLst>
-                            <p:childTnLst>
-                              <p:par>
-                                <p:cTn id="9" presetID="1" presetClass="entr" presetSubtype="0" fill="hold" grpId="0" nodeType="clickEffect">
-                                  <p:stCondLst>
-                                    <p:cond delay="0"/>
-                                  </p:stCondLst>
-                                  <p:childTnLst>
-                                    <p:set>
-                                      <p:cBhvr>
-                                        <p:cTn id="10" dur="1" fill="hold">
-                                          <p:stCondLst>
-                                            <p:cond delay="0"/>
-                                          </p:stCondLst>
-                                        </p:cTn>
-                                        <p:tgtEl>
-                                          <p:spTgt spid="3">
-                                            <p:txEl>
-                                              <p:pRg st="2" end="2"/>
-                                            </p:txEl>
-                                          </p:spTgt>
-                                        </p:tgtEl>
-                                        <p:attrNameLst>
-                                          <p:attrName>style.visibility</p:attrName>
-                                        </p:attrNameLst>
-                                      </p:cBhvr>
-                                      <p:to>
-                                        <p:strVal val="visible"/>
-                                      </p:to>
-                                    </p:set>
-                                  </p:childTnLst>
-                                </p:cTn>
-                              </p:par>
-                            </p:childTnLst>
-                          </p:cTn>
-                        </p:par>
-                      </p:childTnLst>
-                    </p:cTn>
-                  </p:par>
-                  <p:par>
-                    <p:cTn id="11" fill="hold">
-                      <p:stCondLst>
-                        <p:cond delay="indefinite"/>
-                      </p:stCondLst>
-                      <p:childTnLst>
-                        <p:par>
-                          <p:cTn id="12" fill="hold">
-                            <p:stCondLst>
-                              <p:cond delay="0"/>
-                            </p:stCondLst>
-                            <p:childTnLst>
-                              <p:par>
-                                <p:cTn id="13" presetID="1" presetClass="entr" presetSubtype="0" fill="hold" grpId="0" nodeType="clickEffect">
-                                  <p:stCondLst>
-                                    <p:cond delay="0"/>
-                                  </p:stCondLst>
-                                  <p:childTnLst>
-                                    <p:set>
-                                      <p:cBhvr>
-                                        <p:cTn id="14" dur="1" fill="hold">
-                                          <p:stCondLst>
-                                            <p:cond delay="0"/>
-                                          </p:stCondLst>
-                                        </p:cTn>
-                                        <p:tgtEl>
-                                          <p:spTgt spid="3">
-                                            <p:txEl>
-                                              <p:pRg st="4" end="4"/>
-                                            </p:txEl>
-                                          </p:spTgt>
-                                        </p:tgtEl>
-                                        <p:attrNameLst>
-                                          <p:attrName>style.visibility</p:attrName>
-                                        </p:attrNameLst>
-                                      </p:cBhvr>
-                                      <p:to>
-                                        <p:strVal val="visible"/>
-                                      </p:to>
-                                    </p:set>
-                                  </p:childTnLst>
-                                </p:cTn>
-                              </p:par>
-                            </p:childTnLst>
-                          </p:cTn>
-                        </p:par>
-                      </p:childTnLst>
-                    </p:cTn>
-                  </p:par>
-                </p:childTnLst>
-              </p:cTn>
-              <p:prevCondLst>
-                <p:cond evt="onPrev" delay="0">
-                  <p:tgtEl>
-                    <p:sldTgt/>
-                  </p:tgtEl>
-                </p:cond>
-              </p:prevCondLst>
-              <p:nextCondLst>
-                <p:cond evt="onNext" delay="0">
-                  <p:tgtEl>
-                    <p:sldTgt/>
-                  </p:tgtEl>
-                </p:cond>
-              </p:nextCondLst>
-            </p:seq>
-          </p:childTnLst>
-        </p:cTn>
-      </p:par>
-    </p:tnLst>
-    <p:bldLst>
-      <p:bldP spid="3" grpId="0" build="p"/>
-    </p:bldLst>
-  </p:timing>
-</p:sld>
-</file>
-
-<file path=ppt/slides/slide25.xml><?xml version="1.0" encoding="utf-8"?>
-<p:sld xmlns:a="http://schemas.openxmlformats.org/drawingml/2006/main" xmlns:r="http://schemas.openxmlformats.org/officeDocument/2006/relationships" xmlns:p="http://schemas.openxmlformats.org/presentationml/2006/main">
-  <p:cSld>
-    <p:spTree>
-      <p:nvGrpSpPr>
-        <p:cNvPr id="1" name=""/>
-        <p:cNvGrpSpPr/>
-        <p:nvPr/>
-      </p:nvGrpSpPr>
-      <p:grpSpPr>
-        <a:xfrm>
-          <a:off x="0" y="0"/>
-          <a:ext cx="0" cy="0"/>
-          <a:chOff x="0" y="0"/>
-          <a:chExt cx="0" cy="0"/>
-        </a:xfrm>
-      </p:grpSpPr>
-      <p:sp>
-        <p:nvSpPr>
-          <p:cNvPr id="2" name="Title 1">
-            <a:extLst>
-              <a:ext uri="{FF2B5EF4-FFF2-40B4-BE49-F238E27FC236}">
-                <a16:creationId xmlns:a16="http://schemas.microsoft.com/office/drawing/2014/main" id="{4D7DF899-CFB8-A944-8F22-38CFE5674FEC}"/>
-              </a:ext>
-            </a:extLst>
-          </p:cNvPr>
-          <p:cNvSpPr>
-            <a:spLocks noGrp="1"/>
-          </p:cNvSpPr>
-          <p:nvPr>
-            <p:ph type="title"/>
-          </p:nvPr>
-        </p:nvSpPr>
-        <p:spPr/>
-        <p:txBody>
-          <a:bodyPr/>
-          <a:lstStyle/>
-          <a:p>
-            <a:r>
-              <a:rPr lang="en-US" dirty="0"/>
-              <a:t>PROCESS</a:t>
-            </a:r>
-          </a:p>
-        </p:txBody>
-      </p:sp>
-      <p:sp>
-        <p:nvSpPr>
-          <p:cNvPr id="3" name="Content Placeholder 2">
-            <a:extLst>
-              <a:ext uri="{FF2B5EF4-FFF2-40B4-BE49-F238E27FC236}">
-                <a16:creationId xmlns:a16="http://schemas.microsoft.com/office/drawing/2014/main" id="{2EC8518A-D12D-A247-8EE5-95CF00644036}"/>
-              </a:ext>
-            </a:extLst>
-          </p:cNvPr>
-          <p:cNvSpPr>
-            <a:spLocks noGrp="1"/>
-          </p:cNvSpPr>
-          <p:nvPr>
-            <p:ph idx="1"/>
-          </p:nvPr>
-        </p:nvSpPr>
-        <p:spPr/>
-        <p:txBody>
-          <a:bodyPr>
-            <a:normAutofit/>
-          </a:bodyPr>
-          <a:lstStyle/>
-          <a:p>
-            <a:r>
-              <a:rPr lang="en-US" sz="3200" dirty="0"/>
-              <a:t>Will give you strength of both your direct (predictor) and indirect (mediator effects)</a:t>
-            </a:r>
-          </a:p>
-          <a:p>
-            <a:endParaRPr lang="en-US" sz="3200" dirty="0"/>
-          </a:p>
-          <a:p>
-            <a:r>
-              <a:rPr lang="en-US" sz="3200" dirty="0"/>
-              <a:t>That’s what you did …</a:t>
-            </a:r>
-          </a:p>
-        </p:txBody>
-      </p:sp>
-    </p:spTree>
-    <p:extLst>
-      <p:ext uri="{BB962C8B-B14F-4D97-AF65-F5344CB8AC3E}">
-        <p14:creationId xmlns:p14="http://schemas.microsoft.com/office/powerpoint/2010/main" val="981304447"/>
-      </p:ext>
-    </p:extLst>
-  </p:cSld>
-  <p:clrMapOvr>
-    <a:masterClrMapping/>
-  </p:clrMapOvr>
-  <p:timing>
-    <p:tnLst>
-      <p:par>
-        <p:cTn id="1" dur="indefinite" restart="never" nodeType="tmRoot">
-          <p:childTnLst>
-            <p:seq concurrent="1" nextAc="seek">
-              <p:cTn id="2" dur="indefinite" nodeType="mainSeq">
-                <p:childTnLst>
-                  <p:par>
-                    <p:cTn id="3" fill="hold">
-                      <p:stCondLst>
-                        <p:cond delay="indefinite"/>
-                      </p:stCondLst>
-                      <p:childTnLst>
-                        <p:par>
-                          <p:cTn id="4" fill="hold">
-                            <p:stCondLst>
-                              <p:cond delay="0"/>
-                            </p:stCondLst>
-                            <p:childTnLst>
-                              <p:par>
-                                <p:cTn id="5" presetID="1" presetClass="entr" presetSubtype="0" fill="hold" grpId="0" nodeType="clickEffect">
-                                  <p:stCondLst>
-                                    <p:cond delay="0"/>
-                                  </p:stCondLst>
-                                  <p:childTnLst>
-                                    <p:set>
-                                      <p:cBhvr>
-                                        <p:cTn id="6" dur="1" fill="hold">
-                                          <p:stCondLst>
-                                            <p:cond delay="0"/>
-                                          </p:stCondLst>
-                                        </p:cTn>
-                                        <p:tgtEl>
-                                          <p:spTgt spid="3">
-                                            <p:txEl>
-                                              <p:pRg st="0" end="0"/>
-                                            </p:txEl>
-                                          </p:spTgt>
-                                        </p:tgtEl>
-                                        <p:attrNameLst>
-                                          <p:attrName>style.visibility</p:attrName>
-                                        </p:attrNameLst>
-                                      </p:cBhvr>
-                                      <p:to>
-                                        <p:strVal val="visible"/>
-                                      </p:to>
-                                    </p:set>
-                                  </p:childTnLst>
-                                </p:cTn>
-                              </p:par>
-                            </p:childTnLst>
-                          </p:cTn>
-                        </p:par>
-                      </p:childTnLst>
-                    </p:cTn>
-                  </p:par>
-                  <p:par>
-                    <p:cTn id="7" fill="hold">
-                      <p:stCondLst>
-                        <p:cond delay="indefinite"/>
-                      </p:stCondLst>
-                      <p:childTnLst>
-                        <p:par>
-                          <p:cTn id="8" fill="hold">
-                            <p:stCondLst>
-                              <p:cond delay="0"/>
-                            </p:stCondLst>
-                            <p:childTnLst>
-                              <p:par>
-                                <p:cTn id="9" presetID="1" presetClass="entr" presetSubtype="0" fill="hold" grpId="0" nodeType="clickEffect">
-                                  <p:stCondLst>
-                                    <p:cond delay="0"/>
-                                  </p:stCondLst>
-                                  <p:childTnLst>
-                                    <p:set>
-                                      <p:cBhvr>
-                                        <p:cTn id="10" dur="1" fill="hold">
-                                          <p:stCondLst>
-                                            <p:cond delay="0"/>
-                                          </p:stCondLst>
-                                        </p:cTn>
-                                        <p:tgtEl>
-                                          <p:spTgt spid="3">
-                                            <p:txEl>
-                                              <p:pRg st="2" end="2"/>
-                                            </p:txEl>
-                                          </p:spTgt>
-                                        </p:tgtEl>
-                                        <p:attrNameLst>
-                                          <p:attrName>style.visibility</p:attrName>
-                                        </p:attrNameLst>
-                                      </p:cBhvr>
-                                      <p:to>
-                                        <p:strVal val="visible"/>
-                                      </p:to>
-                                    </p:set>
-                                  </p:childTnLst>
-                                </p:cTn>
-                              </p:par>
-                            </p:childTnLst>
-                          </p:cTn>
-                        </p:par>
-                      </p:childTnLst>
-                    </p:cTn>
-                  </p:par>
-                </p:childTnLst>
-              </p:cTn>
-              <p:prevCondLst>
-                <p:cond evt="onPrev" delay="0">
-                  <p:tgtEl>
-                    <p:sldTgt/>
-                  </p:tgtEl>
-                </p:cond>
-              </p:prevCondLst>
-              <p:nextCondLst>
-                <p:cond evt="onNext" delay="0">
-                  <p:tgtEl>
-                    <p:sldTgt/>
-                  </p:tgtEl>
-                </p:cond>
-              </p:nextCondLst>
-            </p:seq>
-          </p:childTnLst>
-        </p:cTn>
-      </p:par>
-    </p:tnLst>
-    <p:bldLst>
-      <p:bldP spid="3" grpId="0" build="p"/>
-    </p:bldLst>
-  </p:timing>
-</p:sld>
-</file>
-
-<file path=ppt/slides/slide26.xml><?xml version="1.0" encoding="utf-8"?>
-<p:sld xmlns:a="http://schemas.openxmlformats.org/drawingml/2006/main" xmlns:r="http://schemas.openxmlformats.org/officeDocument/2006/relationships" xmlns:p="http://schemas.openxmlformats.org/presentationml/2006/main">
-  <p:cSld>
-    <p:spTree>
-      <p:nvGrpSpPr>
-        <p:cNvPr id="1" name=""/>
-        <p:cNvGrpSpPr/>
-        <p:nvPr/>
-      </p:nvGrpSpPr>
-      <p:grpSpPr>
-        <a:xfrm>
-          <a:off x="0" y="0"/>
-          <a:ext cx="0" cy="0"/>
-          <a:chOff x="0" y="0"/>
-          <a:chExt cx="0" cy="0"/>
-        </a:xfrm>
-      </p:grpSpPr>
-      <p:sp>
-        <p:nvSpPr>
-          <p:cNvPr id="3" name="Content Placeholder 2">
-            <a:extLst>
-              <a:ext uri="{FF2B5EF4-FFF2-40B4-BE49-F238E27FC236}">
-                <a16:creationId xmlns:a16="http://schemas.microsoft.com/office/drawing/2014/main" id="{C6F73CED-251B-3665-111F-2BC3388D6B4F}"/>
-              </a:ext>
-            </a:extLst>
-          </p:cNvPr>
-          <p:cNvSpPr>
-            <a:spLocks noGrp="1"/>
-          </p:cNvSpPr>
-          <p:nvPr>
-            <p:ph idx="1"/>
-          </p:nvPr>
-        </p:nvSpPr>
-        <p:spPr>
-          <a:xfrm>
-            <a:off x="0" y="483326"/>
-            <a:ext cx="12096206" cy="6087291"/>
-          </a:xfrm>
-        </p:spPr>
-        <p:txBody>
-          <a:bodyPr>
-            <a:normAutofit fontScale="77500" lnSpcReduction="20000"/>
-          </a:bodyPr>
-          <a:lstStyle/>
-          <a:p>
-            <a:r>
-              <a:rPr lang="en-US" sz="3400" dirty="0"/>
-              <a:t>From Fairchild &amp; McDaniel (2017): </a:t>
-            </a:r>
-            <a:r>
-              <a:rPr lang="en-US" sz="3400" b="0" i="0" dirty="0">
-                <a:solidFill>
-                  <a:srgbClr val="2A2A2A"/>
-                </a:solidFill>
-                <a:effectLst/>
-              </a:rPr>
-              <a:t>Best (but oft-forgotten) practices: mediation analysis. </a:t>
-            </a:r>
-            <a:r>
-              <a:rPr lang="en-US" sz="3400" b="0" i="1" dirty="0">
-                <a:solidFill>
-                  <a:srgbClr val="2A2A2A"/>
-                </a:solidFill>
-                <a:effectLst/>
-              </a:rPr>
-              <a:t>The American Journal of Clinical </a:t>
-            </a:r>
-            <a:r>
-              <a:rPr lang="en-US" sz="3400" b="0" i="1" dirty="0" err="1">
-                <a:solidFill>
-                  <a:srgbClr val="2A2A2A"/>
-                </a:solidFill>
-                <a:effectLst/>
-              </a:rPr>
-              <a:t>Nutrition</a:t>
-            </a:r>
-            <a:r>
-              <a:rPr lang="en-US" sz="3400" b="0" i="0" dirty="0" err="1">
-                <a:solidFill>
-                  <a:srgbClr val="2A2A2A"/>
-                </a:solidFill>
-                <a:effectLst/>
-              </a:rPr>
-              <a:t>,</a:t>
-            </a:r>
-            <a:r>
-              <a:rPr lang="en-US" sz="3400" b="0" i="0" u="none" strike="noStrike" dirty="0" err="1">
-                <a:solidFill>
-                  <a:srgbClr val="006FB7"/>
-                </a:solidFill>
-                <a:effectLst/>
-                <a:hlinkClick r:id="rId3"/>
-              </a:rPr>
-              <a:t>https</a:t>
-            </a:r>
-            <a:r>
-              <a:rPr lang="en-US" sz="3400" b="0" i="0" u="none" strike="noStrike" dirty="0">
-                <a:solidFill>
-                  <a:srgbClr val="006FB7"/>
-                </a:solidFill>
-                <a:effectLst/>
-                <a:hlinkClick r:id="rId3"/>
-              </a:rPr>
-              <a:t>://doi.org/10.3945/ajcn.117.152546</a:t>
-            </a:r>
-            <a:r>
-              <a:rPr lang="en-US" sz="3400" dirty="0"/>
-              <a:t> “</a:t>
-            </a:r>
-            <a:r>
-              <a:rPr lang="en-US" sz="3400" b="0" i="0" dirty="0">
-                <a:solidFill>
-                  <a:srgbClr val="2A2A2A"/>
-                </a:solidFill>
-                <a:effectLst/>
-              </a:rPr>
-              <a:t>cross-sectional sample data can indicate support for mediation effects when there is no true mediation process in the population (</a:t>
-            </a:r>
-            <a:r>
-              <a:rPr lang="en-US" sz="3400" b="0" i="0" u="none" strike="noStrike" dirty="0">
-                <a:solidFill>
-                  <a:srgbClr val="006FB7"/>
-                </a:solidFill>
-                <a:effectLst/>
-              </a:rPr>
-              <a:t>92</a:t>
-            </a:r>
-            <a:r>
-              <a:rPr lang="en-US" sz="3400" b="0" i="0" dirty="0">
-                <a:solidFill>
-                  <a:srgbClr val="2A2A2A"/>
-                </a:solidFill>
-                <a:effectLst/>
-              </a:rPr>
-              <a:t>). These findings are not to say that it is impossible to examine mediation hypotheses with data that are collected at one point in time; however, there is an onus on the researcher to provide a compelling rationale that temporal ordering of the examined variables is correct (</a:t>
-            </a:r>
-            <a:r>
-              <a:rPr lang="en-US" sz="3400" b="0" i="0" u="none" strike="noStrike" dirty="0">
-                <a:solidFill>
-                  <a:srgbClr val="006FB7"/>
-                </a:solidFill>
-                <a:effectLst/>
-              </a:rPr>
-              <a:t>93</a:t>
-            </a:r>
-            <a:r>
-              <a:rPr lang="en-US" sz="3400" b="0" i="0" dirty="0">
-                <a:solidFill>
-                  <a:srgbClr val="2A2A2A"/>
-                </a:solidFill>
-                <a:effectLst/>
-              </a:rPr>
-              <a:t>, </a:t>
-            </a:r>
-            <a:r>
-              <a:rPr lang="en-US" sz="3400" b="0" i="0" u="none" strike="noStrike" dirty="0">
-                <a:solidFill>
-                  <a:srgbClr val="006FB7"/>
-                </a:solidFill>
-                <a:effectLst/>
-              </a:rPr>
-              <a:t>94</a:t>
-            </a:r>
-            <a:r>
-              <a:rPr lang="en-US" sz="3400" b="0" i="0" dirty="0">
-                <a:solidFill>
-                  <a:srgbClr val="2A2A2A"/>
-                </a:solidFill>
-                <a:effectLst/>
-              </a:rPr>
-              <a:t>). Indeed, Kenny and colleagues (</a:t>
-            </a:r>
-            <a:r>
-              <a:rPr lang="en-US" sz="3400" b="0" i="0" u="none" strike="noStrike" dirty="0">
-                <a:solidFill>
-                  <a:srgbClr val="006FB7"/>
-                </a:solidFill>
-                <a:effectLst/>
-              </a:rPr>
-              <a:t>10</a:t>
-            </a:r>
-            <a:r>
-              <a:rPr lang="en-US" sz="3400" b="0" i="0" dirty="0">
-                <a:solidFill>
-                  <a:srgbClr val="2A2A2A"/>
-                </a:solidFill>
-                <a:effectLst/>
-              </a:rPr>
-              <a:t>, </a:t>
-            </a:r>
-            <a:r>
-              <a:rPr lang="en-US" sz="3400" b="0" i="0" u="none" strike="noStrike" dirty="0">
-                <a:solidFill>
-                  <a:srgbClr val="006FB7"/>
-                </a:solidFill>
-                <a:effectLst/>
-              </a:rPr>
-              <a:t>11</a:t>
-            </a:r>
-            <a:r>
-              <a:rPr lang="en-US" sz="3400" b="0" i="0" dirty="0">
-                <a:solidFill>
-                  <a:srgbClr val="2A2A2A"/>
-                </a:solidFill>
-                <a:effectLst/>
-              </a:rPr>
-              <a:t>) emphasized in early work that mediation analysis should not be conducted unless the temporal ordering of the variables is clear. Examining mediation hypotheses with cross-sectional data may be reasonable, for example, if measured variables can reflect nearly instantaneous processes, such as may be the case with some pharmacokinetics work, or imply timing by nature of their construction (</a:t>
-            </a:r>
-            <a:r>
-              <a:rPr lang="en-US" sz="3400" b="0" i="0" u="none" strike="noStrike" dirty="0">
-                <a:solidFill>
-                  <a:srgbClr val="006FB7"/>
-                </a:solidFill>
-                <a:effectLst/>
-              </a:rPr>
-              <a:t>18</a:t>
-            </a:r>
-            <a:r>
-              <a:rPr lang="en-US" sz="3400" b="0" i="0" dirty="0">
-                <a:solidFill>
-                  <a:srgbClr val="2A2A2A"/>
-                </a:solidFill>
-                <a:effectLst/>
-              </a:rPr>
-              <a:t>, </a:t>
-            </a:r>
-            <a:r>
-              <a:rPr lang="en-US" sz="3400" b="0" i="0" u="none" strike="noStrike" dirty="0">
-                <a:solidFill>
-                  <a:srgbClr val="006FB7"/>
-                </a:solidFill>
-                <a:effectLst/>
-              </a:rPr>
-              <a:t>93</a:t>
-            </a:r>
-            <a:r>
-              <a:rPr lang="en-US" sz="3400" b="0" i="0" dirty="0">
-                <a:solidFill>
-                  <a:srgbClr val="2A2A2A"/>
-                </a:solidFill>
-                <a:effectLst/>
-              </a:rPr>
-              <a:t>). Consider a research scenario in which the mediating role of parental food monitoring during an individual’s adolescence (</a:t>
-            </a:r>
-            <a:r>
-              <a:rPr lang="en-US" sz="3400" b="0" i="1" dirty="0">
-                <a:solidFill>
-                  <a:srgbClr val="2A2A2A"/>
-                </a:solidFill>
-                <a:effectLst/>
-              </a:rPr>
-              <a:t>M</a:t>
-            </a:r>
-            <a:r>
-              <a:rPr lang="en-US" sz="3400" b="0" i="0" dirty="0">
-                <a:solidFill>
-                  <a:srgbClr val="2A2A2A"/>
-                </a:solidFill>
-                <a:effectLst/>
-              </a:rPr>
-              <a:t>) is posited to explain the impact of parental childhood obesity (</a:t>
-            </a:r>
-            <a:r>
-              <a:rPr lang="en-US" sz="3400" b="0" i="1" dirty="0">
-                <a:solidFill>
-                  <a:srgbClr val="2A2A2A"/>
-                </a:solidFill>
-                <a:effectLst/>
-              </a:rPr>
-              <a:t>X</a:t>
-            </a:r>
-            <a:r>
-              <a:rPr lang="en-US" sz="3400" b="0" i="0" dirty="0">
-                <a:solidFill>
-                  <a:srgbClr val="2A2A2A"/>
-                </a:solidFill>
-                <a:effectLst/>
-              </a:rPr>
-              <a:t>) on subjects’ current obesity status (</a:t>
-            </a:r>
-            <a:r>
-              <a:rPr lang="en-US" sz="3400" b="0" i="1" dirty="0">
-                <a:solidFill>
-                  <a:srgbClr val="2A2A2A"/>
-                </a:solidFill>
-                <a:effectLst/>
-              </a:rPr>
-              <a:t>Y</a:t>
-            </a:r>
-            <a:r>
-              <a:rPr lang="en-US" sz="3400" b="0" i="0" dirty="0">
-                <a:solidFill>
-                  <a:srgbClr val="2A2A2A"/>
-                </a:solidFill>
-                <a:effectLst/>
-              </a:rPr>
-              <a:t>). Although one may garner this information from participants at a single measurement occasion, it may be sensible to argue temporal precedence of the variables in a causal chain given the chronological nature of the constructs. Researchers should be mindful of potential retrospective reporting bias in these cases, however.”</a:t>
-            </a:r>
-            <a:endParaRPr lang="en-US" sz="3400" dirty="0"/>
-          </a:p>
-          <a:p>
-            <a:endParaRPr lang="en-US" dirty="0"/>
-          </a:p>
-        </p:txBody>
-      </p:sp>
-    </p:spTree>
-    <p:extLst>
-      <p:ext uri="{BB962C8B-B14F-4D97-AF65-F5344CB8AC3E}">
-        <p14:creationId xmlns:p14="http://schemas.microsoft.com/office/powerpoint/2010/main" val="1316173624"/>
-      </p:ext>
-    </p:extLst>
-  </p:cSld>
-  <p:clrMapOvr>
-    <a:masterClrMapping/>
-  </p:clrMapOvr>
-</p:sld>
-</file>
-
-<file path=ppt/slides/slide3.xml><?xml version="1.0" encoding="utf-8"?>
+<file path=ppt/slides/slide4.xml><?xml version="1.0" encoding="utf-8"?>
 <p:sld xmlns:a="http://schemas.openxmlformats.org/drawingml/2006/main" xmlns:r="http://schemas.openxmlformats.org/officeDocument/2006/relationships" xmlns:p="http://schemas.openxmlformats.org/presentationml/2006/main">
   <p:cSld>
     <p:spTree>
@@ -10362,7 +10774,7 @@
 </p:sld>
 </file>
 
-<file path=ppt/slides/slide4.xml><?xml version="1.0" encoding="utf-8"?>
+<file path=ppt/slides/slide5.xml><?xml version="1.0" encoding="utf-8"?>
 <p:sld xmlns:a="http://schemas.openxmlformats.org/drawingml/2006/main" xmlns:r="http://schemas.openxmlformats.org/officeDocument/2006/relationships" xmlns:p="http://schemas.openxmlformats.org/presentationml/2006/main">
   <p:cSld>
     <p:spTree>
@@ -10618,7 +11030,7 @@
 </p:sld>
 </file>
 
-<file path=ppt/slides/slide5.xml><?xml version="1.0" encoding="utf-8"?>
+<file path=ppt/slides/slide6.xml><?xml version="1.0" encoding="utf-8"?>
 <p:sld xmlns:a="http://schemas.openxmlformats.org/drawingml/2006/main" xmlns:r="http://schemas.openxmlformats.org/officeDocument/2006/relationships" xmlns:p="http://schemas.openxmlformats.org/presentationml/2006/main">
   <p:cSld>
     <p:spTree>
@@ -11042,7 +11454,7 @@
 </p:sld>
 </file>
 
-<file path=ppt/slides/slide6.xml><?xml version="1.0" encoding="utf-8"?>
+<file path=ppt/slides/slide7.xml><?xml version="1.0" encoding="utf-8"?>
 <p:sld xmlns:a="http://schemas.openxmlformats.org/drawingml/2006/main" xmlns:r="http://schemas.openxmlformats.org/officeDocument/2006/relationships" xmlns:p="http://schemas.openxmlformats.org/presentationml/2006/main">
   <p:cSld>
     <p:spTree>
@@ -11165,7 +11577,7 @@
 </p:sld>
 </file>
 
-<file path=ppt/slides/slide7.xml><?xml version="1.0" encoding="utf-8"?>
+<file path=ppt/slides/slide8.xml><?xml version="1.0" encoding="utf-8"?>
 <p:sld xmlns:a="http://schemas.openxmlformats.org/drawingml/2006/main" xmlns:r="http://schemas.openxmlformats.org/officeDocument/2006/relationships" xmlns:p="http://schemas.openxmlformats.org/presentationml/2006/main">
   <p:cSld>
     <p:spTree>
@@ -11225,7 +11637,7 @@
 </p:sld>
 </file>
 
-<file path=ppt/slides/slide8.xml><?xml version="1.0" encoding="utf-8"?>
+<file path=ppt/slides/slide9.xml><?xml version="1.0" encoding="utf-8"?>
 <p:sld xmlns:a="http://schemas.openxmlformats.org/drawingml/2006/main" xmlns:r="http://schemas.openxmlformats.org/officeDocument/2006/relationships" xmlns:p="http://schemas.openxmlformats.org/presentationml/2006/main">
   <p:cSld>
     <p:spTree>
@@ -11318,8 +11730,8 @@
           </a:prstGeom>
         </p:spPr>
       </p:pic>
-      <mc:AlternateContent xmlns:mc="http://schemas.openxmlformats.org/markup-compatibility/2006">
-        <mc:Choice xmlns:p14="http://schemas.microsoft.com/office/powerpoint/2010/main" Requires="p14">
+      <mc:AlternateContent xmlns:mc="http://schemas.openxmlformats.org/markup-compatibility/2006" xmlns:p14="http://schemas.microsoft.com/office/powerpoint/2010/main">
+        <mc:Choice Requires="p14">
           <p:contentPart p14:bwMode="auto" r:id="rId4">
             <p14:nvContentPartPr>
               <p14:cNvPr id="3" name="Ink 2">
@@ -11338,7 +11750,7 @@
             </p14:xfrm>
           </p:contentPart>
         </mc:Choice>
-        <mc:Fallback>
+        <mc:Fallback xmlns="">
           <p:pic>
             <p:nvPicPr>
               <p:cNvPr id="3" name="Ink 2">
@@ -11379,289 +11791,6 @@
   <p:clrMapOvr>
     <a:masterClrMapping/>
   </p:clrMapOvr>
-</p:sld>
-</file>
-
-<file path=ppt/slides/slide9.xml><?xml version="1.0" encoding="utf-8"?>
-<p:sld xmlns:a="http://schemas.openxmlformats.org/drawingml/2006/main" xmlns:r="http://schemas.openxmlformats.org/officeDocument/2006/relationships" xmlns:p="http://schemas.openxmlformats.org/presentationml/2006/main">
-  <p:cSld>
-    <p:spTree>
-      <p:nvGrpSpPr>
-        <p:cNvPr id="1" name=""/>
-        <p:cNvGrpSpPr/>
-        <p:nvPr/>
-      </p:nvGrpSpPr>
-      <p:grpSpPr>
-        <a:xfrm>
-          <a:off x="0" y="0"/>
-          <a:ext cx="0" cy="0"/>
-          <a:chOff x="0" y="0"/>
-          <a:chExt cx="0" cy="0"/>
-        </a:xfrm>
-      </p:grpSpPr>
-      <p:sp>
-        <p:nvSpPr>
-          <p:cNvPr id="2" name="Title 1"/>
-          <p:cNvSpPr>
-            <a:spLocks noGrp="1"/>
-          </p:cNvSpPr>
-          <p:nvPr>
-            <p:ph type="title"/>
-          </p:nvPr>
-        </p:nvSpPr>
-        <p:spPr/>
-        <p:txBody>
-          <a:bodyPr/>
-          <a:lstStyle/>
-          <a:p>
-            <a:r>
-              <a:rPr lang="en-US" dirty="0"/>
-              <a:t>Centering Variables</a:t>
-            </a:r>
-          </a:p>
-        </p:txBody>
-      </p:sp>
-      <p:sp>
-        <p:nvSpPr>
-          <p:cNvPr id="3" name="Content Placeholder 2"/>
-          <p:cNvSpPr>
-            <a:spLocks noGrp="1"/>
-          </p:cNvSpPr>
-          <p:nvPr>
-            <p:ph idx="1"/>
-          </p:nvPr>
-        </p:nvSpPr>
-        <p:spPr/>
-        <p:txBody>
-          <a:bodyPr/>
-          <a:lstStyle/>
-          <a:p>
-            <a:r>
-              <a:rPr lang="en-US" sz="3200" dirty="0"/>
-              <a:t>The interaction term makes the </a:t>
-            </a:r>
-            <a:r>
-              <a:rPr lang="en-US" sz="3200" i="1" dirty="0"/>
-              <a:t>b</a:t>
-            </a:r>
-            <a:r>
-              <a:rPr lang="en-US" sz="3200" dirty="0"/>
-              <a:t>s for the main predictors uninterpretable in many situations.</a:t>
-            </a:r>
-          </a:p>
-          <a:p>
-            <a:endParaRPr lang="en-US" sz="3200" dirty="0"/>
-          </a:p>
-          <a:p>
-            <a:r>
-              <a:rPr lang="en-US" sz="3200" dirty="0"/>
-              <a:t>For this reason, it is common to transform the predictors using grand mean centering.</a:t>
-            </a:r>
-          </a:p>
-          <a:p>
-            <a:endParaRPr lang="en-US" sz="3200" dirty="0"/>
-          </a:p>
-          <a:p>
-            <a:r>
-              <a:rPr lang="en-US" sz="3200" dirty="0"/>
-              <a:t>Centering refers to the process of transforming a variable into deviations around a fixed point.</a:t>
-            </a:r>
-          </a:p>
-          <a:p>
-            <a:endParaRPr lang="en-US" dirty="0"/>
-          </a:p>
-        </p:txBody>
-      </p:sp>
-    </p:spTree>
-    <p:extLst>
-      <p:ext uri="{BB962C8B-B14F-4D97-AF65-F5344CB8AC3E}">
-        <p14:creationId xmlns:p14="http://schemas.microsoft.com/office/powerpoint/2010/main" val="3814311374"/>
-      </p:ext>
-    </p:extLst>
-  </p:cSld>
-  <p:clrMapOvr>
-    <a:masterClrMapping/>
-  </p:clrMapOvr>
-  <p:timing>
-    <p:tnLst>
-      <p:par>
-        <p:cTn id="1" dur="indefinite" restart="never" nodeType="tmRoot">
-          <p:childTnLst>
-            <p:seq concurrent="1" nextAc="seek">
-              <p:cTn id="2" dur="indefinite" nodeType="mainSeq">
-                <p:childTnLst>
-                  <p:par>
-                    <p:cTn id="3" fill="hold">
-                      <p:stCondLst>
-                        <p:cond delay="indefinite"/>
-                      </p:stCondLst>
-                      <p:childTnLst>
-                        <p:par>
-                          <p:cTn id="4" fill="hold">
-                            <p:stCondLst>
-                              <p:cond delay="0"/>
-                            </p:stCondLst>
-                            <p:childTnLst>
-                              <p:par>
-                                <p:cTn id="5" presetID="1" presetClass="entr" presetSubtype="0" fill="hold" grpId="0" nodeType="clickEffect">
-                                  <p:stCondLst>
-                                    <p:cond delay="0"/>
-                                  </p:stCondLst>
-                                  <p:childTnLst>
-                                    <p:set>
-                                      <p:cBhvr>
-                                        <p:cTn id="6" dur="1" fill="hold">
-                                          <p:stCondLst>
-                                            <p:cond delay="0"/>
-                                          </p:stCondLst>
-                                        </p:cTn>
-                                        <p:tgtEl>
-                                          <p:spTgt spid="3">
-                                            <p:txEl>
-                                              <p:pRg st="0" end="0"/>
-                                            </p:txEl>
-                                          </p:spTgt>
-                                        </p:tgtEl>
-                                        <p:attrNameLst>
-                                          <p:attrName>style.visibility</p:attrName>
-                                        </p:attrNameLst>
-                                      </p:cBhvr>
-                                      <p:to>
-                                        <p:strVal val="visible"/>
-                                      </p:to>
-                                    </p:set>
-                                  </p:childTnLst>
-                                </p:cTn>
-                              </p:par>
-                            </p:childTnLst>
-                          </p:cTn>
-                        </p:par>
-                      </p:childTnLst>
-                    </p:cTn>
-                  </p:par>
-                  <p:par>
-                    <p:cTn id="7" fill="hold">
-                      <p:stCondLst>
-                        <p:cond delay="indefinite"/>
-                      </p:stCondLst>
-                      <p:childTnLst>
-                        <p:par>
-                          <p:cTn id="8" fill="hold">
-                            <p:stCondLst>
-                              <p:cond delay="0"/>
-                            </p:stCondLst>
-                            <p:childTnLst>
-                              <p:par>
-                                <p:cTn id="9" presetID="1" presetClass="entr" presetSubtype="0" fill="hold" grpId="0" nodeType="clickEffect">
-                                  <p:stCondLst>
-                                    <p:cond delay="0"/>
-                                  </p:stCondLst>
-                                  <p:childTnLst>
-                                    <p:set>
-                                      <p:cBhvr>
-                                        <p:cTn id="10" dur="1" fill="hold">
-                                          <p:stCondLst>
-                                            <p:cond delay="0"/>
-                                          </p:stCondLst>
-                                        </p:cTn>
-                                        <p:tgtEl>
-                                          <p:spTgt spid="3">
-                                            <p:txEl>
-                                              <p:pRg st="2" end="2"/>
-                                            </p:txEl>
-                                          </p:spTgt>
-                                        </p:tgtEl>
-                                        <p:attrNameLst>
-                                          <p:attrName>style.visibility</p:attrName>
-                                        </p:attrNameLst>
-                                      </p:cBhvr>
-                                      <p:to>
-                                        <p:strVal val="visible"/>
-                                      </p:to>
-                                    </p:set>
-                                  </p:childTnLst>
-                                </p:cTn>
-                              </p:par>
-                            </p:childTnLst>
-                          </p:cTn>
-                        </p:par>
-                      </p:childTnLst>
-                    </p:cTn>
-                  </p:par>
-                  <p:par>
-                    <p:cTn id="11" fill="hold">
-                      <p:stCondLst>
-                        <p:cond delay="indefinite"/>
-                      </p:stCondLst>
-                      <p:childTnLst>
-                        <p:par>
-                          <p:cTn id="12" fill="hold">
-                            <p:stCondLst>
-                              <p:cond delay="0"/>
-                            </p:stCondLst>
-                            <p:childTnLst>
-                              <p:par>
-                                <p:cTn id="13" presetID="1" presetClass="entr" presetSubtype="0" fill="hold" grpId="0" nodeType="clickEffect">
-                                  <p:stCondLst>
-                                    <p:cond delay="0"/>
-                                  </p:stCondLst>
-                                  <p:childTnLst>
-                                    <p:set>
-                                      <p:cBhvr>
-                                        <p:cTn id="14" dur="1" fill="hold">
-                                          <p:stCondLst>
-                                            <p:cond delay="0"/>
-                                          </p:stCondLst>
-                                        </p:cTn>
-                                        <p:tgtEl>
-                                          <p:spTgt spid="3">
-                                            <p:txEl>
-                                              <p:pRg st="4" end="4"/>
-                                            </p:txEl>
-                                          </p:spTgt>
-                                        </p:tgtEl>
-                                        <p:attrNameLst>
-                                          <p:attrName>style.visibility</p:attrName>
-                                        </p:attrNameLst>
-                                      </p:cBhvr>
-                                      <p:to>
-                                        <p:strVal val="visible"/>
-                                      </p:to>
-                                    </p:set>
-                                  </p:childTnLst>
-                                </p:cTn>
-                              </p:par>
-                            </p:childTnLst>
-                          </p:cTn>
-                        </p:par>
-                      </p:childTnLst>
-                    </p:cTn>
-                  </p:par>
-                </p:childTnLst>
-              </p:cTn>
-              <p:prevCondLst>
-                <p:cond evt="onPrev" delay="0">
-                  <p:tgtEl>
-                    <p:sldTgt/>
-                  </p:tgtEl>
-                </p:cond>
-              </p:prevCondLst>
-              <p:nextCondLst>
-                <p:cond evt="onNext" delay="0">
-                  <p:tgtEl>
-                    <p:sldTgt/>
-                  </p:tgtEl>
-                </p:cond>
-              </p:nextCondLst>
-            </p:seq>
-          </p:childTnLst>
-        </p:cTn>
-      </p:par>
-    </p:tnLst>
-    <p:bldLst>
-      <p:bldP spid="3" grpId="0" build="p"/>
-    </p:bldLst>
-  </p:timing>
 </p:sld>
 </file>
 
